--- a/fubc-en/5-My Worth Is Not In What I Own.pptx
+++ b/fubc-en/5-My Worth Is Not In What I Own.pptx
@@ -2444,23 +2444,6 @@
             </a:r>
             <a:endParaRPr lang="en-US" sz="4000" dirty="0"/>
           </a:p>
-          <a:p>
-            <a:pPr algn="ctr" indent="0" marL="0">
-              <a:buNone/>
-            </a:pPr>
-            <a:r>
-              <a:rPr lang="en-US" sz="4000" b="1" i="1" dirty="0">
-                <a:solidFill>
-                  <a:srgbClr val="FFFFFF"/>
-                </a:solidFill>
-                <a:latin typeface="Arial" pitchFamily="34" charset="0"/>
-                <a:ea typeface="Arial" pitchFamily="34" charset="-122"/>
-                <a:cs typeface="Arial" pitchFamily="34" charset="-120"/>
-              </a:rPr>
-              <a:t>I rejoice in my Redeemer,</a:t>
-            </a:r>
-            <a:endParaRPr lang="en-US" sz="4000" dirty="0"/>
-          </a:p>
         </p:txBody>
       </p:sp>
     </p:spTree>
@@ -2528,6 +2511,23 @@
                 <a:ea typeface="Arial" pitchFamily="34" charset="-122"/>
                 <a:cs typeface="Arial" pitchFamily="34" charset="-120"/>
               </a:rPr>
+              <a:t>I rejoice in my Redeemer,</a:t>
+            </a:r>
+            <a:endParaRPr lang="en-US" sz="4000" dirty="0"/>
+          </a:p>
+          <a:p>
+            <a:pPr algn="ctr" indent="0" marL="0">
+              <a:buNone/>
+            </a:pPr>
+            <a:r>
+              <a:rPr lang="en-US" sz="4000" b="1" i="1" dirty="0">
+                <a:solidFill>
+                  <a:srgbClr val="FFFFFF"/>
+                </a:solidFill>
+                <a:latin typeface="Arial" pitchFamily="34" charset="0"/>
+                <a:ea typeface="Arial" pitchFamily="34" charset="-122"/>
+                <a:cs typeface="Arial" pitchFamily="34" charset="-120"/>
+              </a:rPr>
               <a:t>Greatest Treasure, Wellspring of my soul.</a:t>
             </a:r>
             <a:endParaRPr lang="en-US" sz="4000" dirty="0"/>
@@ -2562,7 +2562,7 @@
                 <a:ea typeface="Arial" pitchFamily="34" charset="-122"/>
                 <a:cs typeface="Arial" pitchFamily="34" charset="-120"/>
               </a:rPr>
-              <a:t>my soul is satisfied in Him alone.</a:t>
+              <a:t>My soul is satisfied in Him alone.</a:t>
             </a:r>
             <a:endParaRPr lang="en-US" sz="4000" dirty="0"/>
           </a:p>

--- a/fubc-en/5-My Worth Is Not In What I Own.pptx
+++ b/fubc-en/5-My Worth Is Not In What I Own.pptx
@@ -14,9 +14,10 @@
     <p:sldId id="262" r:id="rId8"/>
     <p:sldId id="263" r:id="rId9"/>
     <p:sldId id="264" r:id="rId10"/>
+    <p:sldId id="265" r:id="rId11"/>
   </p:sldIdLst>
   <p:notesMasterIdLst>
-    <p:notesMasterId r:id="rId11"/>
+    <p:notesMasterId r:id="rId12"/>
   </p:notesMasterIdLst>
   <p:sldSz cx="12192000" cy="6858000"/>
   <p:notesSz cx="6858000" cy="12192000"/>
@@ -534,6 +535,94 @@
             <a:fld id="{F7021451-1387-4CA6-816F-3879F97B5CBC}" type="slidenum">
               <a:rPr lang="en-US"/>
               <a:t>1</a:t>
+            </a:fld>
+            <a:endParaRPr lang="en-US"/>
+          </a:p>
+        </p:txBody>
+      </p:sp>
+    </p:spTree>
+    <p:extLst>
+      <p:ext uri="{BB962C8B-B14F-4D97-AF65-F5344CB8AC3E}">
+        <p14:creationId xmlns:p14="http://schemas.microsoft.com/office/powerpoint/2010/main" val="1024086991"/>
+      </p:ext>
+    </p:extLst>
+  </p:cSld>
+  <p:clrMapOvr>
+    <a:masterClrMapping/>
+  </p:clrMapOvr>
+</p:notes>
+</file>
+
+<file path=ppt/notesSlides/notesSlide10.xml><?xml version="1.0" encoding="utf-8"?>
+<p:notes xmlns:a="http://schemas.openxmlformats.org/drawingml/2006/main" xmlns:r="http://schemas.openxmlformats.org/officeDocument/2006/relationships" xmlns:p="http://schemas.openxmlformats.org/presentationml/2006/main">
+  <p:cSld>
+    <p:spTree>
+      <p:nvGrpSpPr>
+        <p:cNvPr id="1" name=""/>
+        <p:cNvGrpSpPr/>
+        <p:nvPr/>
+      </p:nvGrpSpPr>
+      <p:grpSpPr>
+        <a:xfrm>
+          <a:off x="0" y="0"/>
+          <a:ext cx="0" cy="0"/>
+          <a:chOff x="0" y="0"/>
+          <a:chExt cx="0" cy="0"/>
+        </a:xfrm>
+      </p:grpSpPr>
+      <p:sp>
+        <p:nvSpPr>
+          <p:cNvPr id="2" name="Slide Image Placeholder 1"/>
+          <p:cNvSpPr>
+            <a:spLocks noGrp="1" noRot="1" noChangeAspect="1"/>
+          </p:cNvSpPr>
+          <p:nvPr>
+            <p:ph type="sldImg"/>
+          </p:nvPr>
+        </p:nvSpPr>
+        <p:spPr/>
+      </p:sp>
+      <p:sp>
+        <p:nvSpPr>
+          <p:cNvPr id="3" name="Notes Placeholder 2"/>
+          <p:cNvSpPr>
+            <a:spLocks noGrp="1"/>
+          </p:cNvSpPr>
+          <p:nvPr>
+            <p:ph type="body" idx="1"/>
+          </p:nvPr>
+        </p:nvSpPr>
+        <p:spPr/>
+        <p:txBody>
+          <a:bodyPr/>
+          <a:lstStyle/>
+          <a:p>
+            <a:r>
+              <a:rPr lang="en-US" dirty="0"/>
+              <a:t/>
+            </a:r>
+            <a:endParaRPr lang="en-US" dirty="0"/>
+          </a:p>
+        </p:txBody>
+      </p:sp>
+      <p:sp>
+        <p:nvSpPr>
+          <p:cNvPr id="4" name="Slide Number Placeholder 3"/>
+          <p:cNvSpPr>
+            <a:spLocks noGrp="1"/>
+          </p:cNvSpPr>
+          <p:nvPr>
+            <p:ph type="sldNum" sz="quarter" idx="10"/>
+          </p:nvPr>
+        </p:nvSpPr>
+        <p:spPr/>
+        <p:txBody>
+          <a:bodyPr/>
+          <a:lstStyle/>
+          <a:p>
+            <a:fld id="{F7021451-1387-4CA6-816F-3879F97B5CBC}" type="slidenum">
+              <a:rPr lang="en-US"/>
+              <a:t>10</a:t>
             </a:fld>
             <a:endParaRPr lang="en-US"/>
           </a:p>
@@ -1612,51 +1701,173 @@
               <a:buNone/>
             </a:pPr>
             <a:r>
-              <a:rPr lang="en-US" sz="4000" b="1" dirty="0">
-                <a:solidFill>
-                  <a:srgbClr val="FFFFFF"/>
-                </a:solidFill>
-                <a:latin typeface="Arial" pitchFamily="34" charset="0"/>
-                <a:ea typeface="Arial" pitchFamily="34" charset="-122"/>
-                <a:cs typeface="Arial" pitchFamily="34" charset="-120"/>
-              </a:rPr>
-              <a:t>My worth is not in what I own,</a:t>
-            </a:r>
-            <a:endParaRPr lang="en-US" sz="4000" dirty="0"/>
-          </a:p>
-          <a:p>
-            <a:pPr algn="ctr" indent="0" marL="0">
-              <a:buNone/>
-            </a:pPr>
-            <a:r>
-              <a:rPr lang="en-US" sz="4000" b="1" dirty="0">
-                <a:solidFill>
-                  <a:srgbClr val="FFFFFF"/>
-                </a:solidFill>
-                <a:latin typeface="Arial" pitchFamily="34" charset="0"/>
-                <a:ea typeface="Arial" pitchFamily="34" charset="-122"/>
-                <a:cs typeface="Arial" pitchFamily="34" charset="-120"/>
-              </a:rPr>
-              <a:t>not in the strength of flesh and bone.</a:t>
-            </a:r>
-            <a:endParaRPr lang="en-US" sz="4000" dirty="0"/>
-          </a:p>
-          <a:p>
-            <a:pPr algn="ctr" indent="0" marL="0">
-              <a:buNone/>
-            </a:pPr>
-            <a:r>
-              <a:rPr lang="en-US" sz="4000" b="1" dirty="0">
-                <a:solidFill>
-                  <a:srgbClr val="FFFFFF"/>
-                </a:solidFill>
-                <a:latin typeface="Arial" pitchFamily="34" charset="0"/>
-                <a:ea typeface="Arial" pitchFamily="34" charset="-122"/>
-                <a:cs typeface="Arial" pitchFamily="34" charset="-120"/>
-              </a:rPr>
-              <a:t>But in the costly wounds of love, at the cross.</a:t>
-            </a:r>
-            <a:endParaRPr lang="en-US" sz="4000" dirty="0"/>
+              <a:rPr lang="en-US" sz="4800" b="1" dirty="0">
+                <a:solidFill>
+                  <a:srgbClr val="FFFFFF"/>
+                </a:solidFill>
+                <a:latin typeface="Arial" pitchFamily="34" charset="0"/>
+                <a:ea typeface="Arial" pitchFamily="34" charset="-122"/>
+                <a:cs typeface="Arial" pitchFamily="34" charset="-120"/>
+              </a:rPr>
+              <a:t>My Worth Is Not In What I Own</a:t>
+            </a:r>
+            <a:endParaRPr lang="en-US" sz="4800" dirty="0"/>
+          </a:p>
+        </p:txBody>
+      </p:sp>
+    </p:spTree>
+  </p:cSld>
+  <p:clrMapOvr>
+    <a:masterClrMapping/>
+  </p:clrMapOvr>
+</p:sld>
+</file>
+
+<file path=ppt/slides/slide10.xml><?xml version="1.0" encoding="utf-8"?>
+<p:sld xmlns:a="http://schemas.openxmlformats.org/drawingml/2006/main" xmlns:r="http://schemas.openxmlformats.org/officeDocument/2006/relationships" xmlns:p="http://schemas.openxmlformats.org/presentationml/2006/main">
+  <p:cSld name="Slide 10">
+    <p:bg>
+      <p:bgPr>
+        <a:solidFill>
+          <a:srgbClr val="000000"/>
+        </a:solidFill>
+      </p:bgPr>
+    </p:bg>
+    <p:spTree>
+      <p:nvGrpSpPr>
+        <p:cNvPr id="1" name=""/>
+        <p:cNvGrpSpPr/>
+        <p:nvPr/>
+      </p:nvGrpSpPr>
+      <p:grpSpPr>
+        <a:xfrm>
+          <a:off x="0" y="0"/>
+          <a:ext cx="0" cy="0"/>
+          <a:chOff x="0" y="0"/>
+          <a:chExt cx="0" cy="0"/>
+        </a:xfrm>
+      </p:grpSpPr>
+      <p:sp>
+        <p:nvSpPr>
+          <p:cNvPr id="2" name="Text 0"/>
+          <p:cNvSpPr txBox="1"/>
+          <p:nvPr/>
+        </p:nvSpPr>
+        <p:spPr>
+          <a:xfrm>
+            <a:off x="548640" y="457200"/>
+            <a:ext cx="11064240" cy="5943600"/>
+          </a:xfrm>
+          <a:prstGeom prst="rect">
+            <a:avLst/>
+          </a:prstGeom>
+          <a:noFill/>
+          <a:ln/>
+        </p:spPr>
+        <p:txBody>
+          <a:bodyPr wrap="square" lIns="0" tIns="0" rIns="0" bIns="0" rtlCol="0" anchor="ctr"/>
+          <a:lstStyle/>
+          <a:p>
+            <a:pPr algn="ctr" indent="0" marL="0">
+              <a:buNone/>
+            </a:pPr>
+            <a:r>
+              <a:rPr lang="en-US" sz="4800" b="1" i="1" dirty="0">
+                <a:solidFill>
+                  <a:srgbClr val="FFFFFF"/>
+                </a:solidFill>
+                <a:latin typeface="Arial" pitchFamily="34" charset="0"/>
+                <a:ea typeface="Arial" pitchFamily="34" charset="-122"/>
+                <a:cs typeface="Arial" pitchFamily="34" charset="-120"/>
+              </a:rPr>
+              <a:t>I rejoice in my Redeemer,</a:t>
+            </a:r>
+            <a:endParaRPr lang="en-US" sz="4800" dirty="0"/>
+          </a:p>
+          <a:p>
+            <a:pPr algn="ctr" indent="0" marL="0">
+              <a:buNone/>
+            </a:pPr>
+            <a:r>
+              <a:rPr lang="en-US" sz="4800" b="1" i="1" dirty="0">
+                <a:solidFill>
+                  <a:srgbClr val="FFFFFF"/>
+                </a:solidFill>
+                <a:latin typeface="Arial" pitchFamily="34" charset="0"/>
+                <a:ea typeface="Arial" pitchFamily="34" charset="-122"/>
+                <a:cs typeface="Arial" pitchFamily="34" charset="-120"/>
+              </a:rPr>
+              <a:t>Greatest Treasure, Wellspring of my soul.</a:t>
+            </a:r>
+            <a:endParaRPr lang="en-US" sz="4800" dirty="0"/>
+          </a:p>
+          <a:p>
+            <a:pPr algn="ctr" indent="0" marL="0">
+              <a:buNone/>
+            </a:pPr>
+            <a:r>
+              <a:rPr lang="en-US" sz="4800" b="1" i="1" dirty="0">
+                <a:solidFill>
+                  <a:srgbClr val="FFFFFF"/>
+                </a:solidFill>
+                <a:latin typeface="Arial" pitchFamily="34" charset="0"/>
+                <a:ea typeface="Arial" pitchFamily="34" charset="-122"/>
+                <a:cs typeface="Arial" pitchFamily="34" charset="-120"/>
+              </a:rPr>
+              <a:t>I will trust in Him, no other,</a:t>
+            </a:r>
+            <a:endParaRPr lang="en-US" sz="4800" dirty="0"/>
+          </a:p>
+          <a:p>
+            <a:pPr algn="ctr" indent="0" marL="0">
+              <a:buNone/>
+            </a:pPr>
+            <a:r>
+              <a:rPr lang="en-US" sz="4800" b="1" i="1" dirty="0">
+                <a:solidFill>
+                  <a:srgbClr val="FFFFFF"/>
+                </a:solidFill>
+                <a:latin typeface="Arial" pitchFamily="34" charset="0"/>
+                <a:ea typeface="Arial" pitchFamily="34" charset="-122"/>
+                <a:cs typeface="Arial" pitchFamily="34" charset="-120"/>
+              </a:rPr>
+              <a:t>My soul is satisfied in Him alone.</a:t>
+            </a:r>
+            <a:endParaRPr lang="en-US" sz="4800" dirty="0"/>
+          </a:p>
+          <a:p>
+            <a:pPr algn="ctr" indent="0" marL="0">
+              <a:buNone/>
+            </a:pPr>
+            <a:r>
+              <a:rPr lang="en-US" sz="4800" b="1" i="1" dirty="0">
+                <a:solidFill>
+                  <a:srgbClr val="FFFFFF"/>
+                </a:solidFill>
+                <a:latin typeface="Arial" pitchFamily="34" charset="0"/>
+                <a:ea typeface="Arial" pitchFamily="34" charset="-122"/>
+                <a:cs typeface="Arial" pitchFamily="34" charset="-120"/>
+              </a:rPr>
+              <a:t>My soul is satisfied in Him alone.</a:t>
+            </a:r>
+            <a:endParaRPr lang="en-US" sz="4800" dirty="0"/>
+          </a:p>
+          <a:p>
+            <a:pPr algn="ctr" indent="0" marL="0">
+              <a:buNone/>
+            </a:pPr>
+            <a:r>
+              <a:rPr lang="en-US" sz="4800" b="1" i="1" dirty="0">
+                <a:solidFill>
+                  <a:srgbClr val="FFFFFF"/>
+                </a:solidFill>
+                <a:latin typeface="Arial" pitchFamily="34" charset="0"/>
+                <a:ea typeface="Arial" pitchFamily="34" charset="-122"/>
+                <a:cs typeface="Arial" pitchFamily="34" charset="-120"/>
+              </a:rPr>
+              <a:t>***</a:t>
+            </a:r>
+            <a:endParaRPr lang="en-US" sz="4800" dirty="0"/>
           </a:p>
         </p:txBody>
       </p:sp>
@@ -1717,51 +1928,51 @@
               <a:buNone/>
             </a:pPr>
             <a:r>
-              <a:rPr lang="en-US" sz="4000" b="1" dirty="0">
-                <a:solidFill>
-                  <a:srgbClr val="FFFFFF"/>
-                </a:solidFill>
-                <a:latin typeface="Arial" pitchFamily="34" charset="0"/>
-                <a:ea typeface="Arial" pitchFamily="34" charset="-122"/>
-                <a:cs typeface="Arial" pitchFamily="34" charset="-120"/>
-              </a:rPr>
-              <a:t>My worth is not in skill or name,</a:t>
-            </a:r>
-            <a:endParaRPr lang="en-US" sz="4000" dirty="0"/>
-          </a:p>
-          <a:p>
-            <a:pPr algn="ctr" indent="0" marL="0">
-              <a:buNone/>
-            </a:pPr>
-            <a:r>
-              <a:rPr lang="en-US" sz="4000" b="1" dirty="0">
-                <a:solidFill>
-                  <a:srgbClr val="FFFFFF"/>
-                </a:solidFill>
-                <a:latin typeface="Arial" pitchFamily="34" charset="0"/>
-                <a:ea typeface="Arial" pitchFamily="34" charset="-122"/>
-                <a:cs typeface="Arial" pitchFamily="34" charset="-120"/>
-              </a:rPr>
-              <a:t>in win or lose, in pride or shame.</a:t>
-            </a:r>
-            <a:endParaRPr lang="en-US" sz="4000" dirty="0"/>
-          </a:p>
-          <a:p>
-            <a:pPr algn="ctr" indent="0" marL="0">
-              <a:buNone/>
-            </a:pPr>
-            <a:r>
-              <a:rPr lang="en-US" sz="4000" b="1" dirty="0">
-                <a:solidFill>
-                  <a:srgbClr val="FFFFFF"/>
-                </a:solidFill>
-                <a:latin typeface="Arial" pitchFamily="34" charset="0"/>
-                <a:ea typeface="Arial" pitchFamily="34" charset="-122"/>
-                <a:cs typeface="Arial" pitchFamily="34" charset="-120"/>
-              </a:rPr>
-              <a:t>But in the blood of Christ that flowed at the cross.</a:t>
-            </a:r>
-            <a:endParaRPr lang="en-US" sz="4000" dirty="0"/>
+              <a:rPr lang="en-US" sz="4800" b="1" dirty="0">
+                <a:solidFill>
+                  <a:srgbClr val="FFFFFF"/>
+                </a:solidFill>
+                <a:latin typeface="Arial" pitchFamily="34" charset="0"/>
+                <a:ea typeface="Arial" pitchFamily="34" charset="-122"/>
+                <a:cs typeface="Arial" pitchFamily="34" charset="-120"/>
+              </a:rPr>
+              <a:t>My worth is not in what I own,</a:t>
+            </a:r>
+            <a:endParaRPr lang="en-US" sz="4800" dirty="0"/>
+          </a:p>
+          <a:p>
+            <a:pPr algn="ctr" indent="0" marL="0">
+              <a:buNone/>
+            </a:pPr>
+            <a:r>
+              <a:rPr lang="en-US" sz="4800" b="1" dirty="0">
+                <a:solidFill>
+                  <a:srgbClr val="FFFFFF"/>
+                </a:solidFill>
+                <a:latin typeface="Arial" pitchFamily="34" charset="0"/>
+                <a:ea typeface="Arial" pitchFamily="34" charset="-122"/>
+                <a:cs typeface="Arial" pitchFamily="34" charset="-120"/>
+              </a:rPr>
+              <a:t>not in the strength of flesh and bone.</a:t>
+            </a:r>
+            <a:endParaRPr lang="en-US" sz="4800" dirty="0"/>
+          </a:p>
+          <a:p>
+            <a:pPr algn="ctr" indent="0" marL="0">
+              <a:buNone/>
+            </a:pPr>
+            <a:r>
+              <a:rPr lang="en-US" sz="4800" b="1" dirty="0">
+                <a:solidFill>
+                  <a:srgbClr val="FFFFFF"/>
+                </a:solidFill>
+                <a:latin typeface="Arial" pitchFamily="34" charset="0"/>
+                <a:ea typeface="Arial" pitchFamily="34" charset="-122"/>
+                <a:cs typeface="Arial" pitchFamily="34" charset="-120"/>
+              </a:rPr>
+              <a:t>But in the costly wounds of love, at the cross.</a:t>
+            </a:r>
+            <a:endParaRPr lang="en-US" sz="4800" dirty="0"/>
           </a:p>
         </p:txBody>
       </p:sp>
@@ -1822,68 +2033,51 @@
               <a:buNone/>
             </a:pPr>
             <a:r>
-              <a:rPr lang="en-US" sz="4000" b="1" i="1" dirty="0">
-                <a:solidFill>
-                  <a:srgbClr val="FFFFFF"/>
-                </a:solidFill>
-                <a:latin typeface="Arial" pitchFamily="34" charset="0"/>
-                <a:ea typeface="Arial" pitchFamily="34" charset="-122"/>
-                <a:cs typeface="Arial" pitchFamily="34" charset="-120"/>
-              </a:rPr>
-              <a:t>I rejoice in my Redeemer,</a:t>
-            </a:r>
-            <a:endParaRPr lang="en-US" sz="4000" dirty="0"/>
-          </a:p>
-          <a:p>
-            <a:pPr algn="ctr" indent="0" marL="0">
-              <a:buNone/>
-            </a:pPr>
-            <a:r>
-              <a:rPr lang="en-US" sz="4000" b="1" i="1" dirty="0">
-                <a:solidFill>
-                  <a:srgbClr val="FFFFFF"/>
-                </a:solidFill>
-                <a:latin typeface="Arial" pitchFamily="34" charset="0"/>
-                <a:ea typeface="Arial" pitchFamily="34" charset="-122"/>
-                <a:cs typeface="Arial" pitchFamily="34" charset="-120"/>
-              </a:rPr>
-              <a:t>Greatest Treasure, Wellspring of my soul.</a:t>
-            </a:r>
-            <a:endParaRPr lang="en-US" sz="4000" dirty="0"/>
-          </a:p>
-          <a:p>
-            <a:pPr algn="ctr" indent="0" marL="0">
-              <a:buNone/>
-            </a:pPr>
-            <a:r>
-              <a:rPr lang="en-US" sz="4000" b="1" i="1" dirty="0">
-                <a:solidFill>
-                  <a:srgbClr val="FFFFFF"/>
-                </a:solidFill>
-                <a:latin typeface="Arial" pitchFamily="34" charset="0"/>
-                <a:ea typeface="Arial" pitchFamily="34" charset="-122"/>
-                <a:cs typeface="Arial" pitchFamily="34" charset="-120"/>
-              </a:rPr>
-              <a:t>I will trust in Him, no other,</a:t>
-            </a:r>
-            <a:endParaRPr lang="en-US" sz="4000" dirty="0"/>
-          </a:p>
-          <a:p>
-            <a:pPr algn="ctr" indent="0" marL="0">
-              <a:buNone/>
-            </a:pPr>
-            <a:r>
-              <a:rPr lang="en-US" sz="4000" b="1" i="1" dirty="0">
-                <a:solidFill>
-                  <a:srgbClr val="FFFFFF"/>
-                </a:solidFill>
-                <a:latin typeface="Arial" pitchFamily="34" charset="0"/>
-                <a:ea typeface="Arial" pitchFamily="34" charset="-122"/>
-                <a:cs typeface="Arial" pitchFamily="34" charset="-120"/>
-              </a:rPr>
-              <a:t>my soul is satisfied in Him alone.</a:t>
-            </a:r>
-            <a:endParaRPr lang="en-US" sz="4000" dirty="0"/>
+              <a:rPr lang="en-US" sz="4800" b="1" dirty="0">
+                <a:solidFill>
+                  <a:srgbClr val="FFFFFF"/>
+                </a:solidFill>
+                <a:latin typeface="Arial" pitchFamily="34" charset="0"/>
+                <a:ea typeface="Arial" pitchFamily="34" charset="-122"/>
+                <a:cs typeface="Arial" pitchFamily="34" charset="-120"/>
+              </a:rPr>
+              <a:t>My worth is not in skill or name,</a:t>
+            </a:r>
+            <a:endParaRPr lang="en-US" sz="4800" dirty="0"/>
+          </a:p>
+          <a:p>
+            <a:pPr algn="ctr" indent="0" marL="0">
+              <a:buNone/>
+            </a:pPr>
+            <a:r>
+              <a:rPr lang="en-US" sz="4800" b="1" dirty="0">
+                <a:solidFill>
+                  <a:srgbClr val="FFFFFF"/>
+                </a:solidFill>
+                <a:latin typeface="Arial" pitchFamily="34" charset="0"/>
+                <a:ea typeface="Arial" pitchFamily="34" charset="-122"/>
+                <a:cs typeface="Arial" pitchFamily="34" charset="-120"/>
+              </a:rPr>
+              <a:t>in win or lose, in pride or shame.</a:t>
+            </a:r>
+            <a:endParaRPr lang="en-US" sz="4800" dirty="0"/>
+          </a:p>
+          <a:p>
+            <a:pPr algn="ctr" indent="0" marL="0">
+              <a:buNone/>
+            </a:pPr>
+            <a:r>
+              <a:rPr lang="en-US" sz="4800" b="1" dirty="0">
+                <a:solidFill>
+                  <a:srgbClr val="FFFFFF"/>
+                </a:solidFill>
+                <a:latin typeface="Arial" pitchFamily="34" charset="0"/>
+                <a:ea typeface="Arial" pitchFamily="34" charset="-122"/>
+                <a:cs typeface="Arial" pitchFamily="34" charset="-120"/>
+              </a:rPr>
+              <a:t>But in the blood of Christ that flowed at the cross.</a:t>
+            </a:r>
+            <a:endParaRPr lang="en-US" sz="4800" dirty="0"/>
           </a:p>
         </p:txBody>
       </p:sp>
@@ -1944,51 +2138,68 @@
               <a:buNone/>
             </a:pPr>
             <a:r>
-              <a:rPr lang="en-US" sz="4000" b="1" dirty="0">
-                <a:solidFill>
-                  <a:srgbClr val="FFFFFF"/>
-                </a:solidFill>
-                <a:latin typeface="Arial" pitchFamily="34" charset="0"/>
-                <a:ea typeface="Arial" pitchFamily="34" charset="-122"/>
-                <a:cs typeface="Arial" pitchFamily="34" charset="-120"/>
-              </a:rPr>
-              <a:t>As summer flowers we fade and die.</a:t>
-            </a:r>
-            <a:endParaRPr lang="en-US" sz="4000" dirty="0"/>
-          </a:p>
-          <a:p>
-            <a:pPr algn="ctr" indent="0" marL="0">
-              <a:buNone/>
-            </a:pPr>
-            <a:r>
-              <a:rPr lang="en-US" sz="4000" b="1" dirty="0">
-                <a:solidFill>
-                  <a:srgbClr val="FFFFFF"/>
-                </a:solidFill>
-                <a:latin typeface="Arial" pitchFamily="34" charset="0"/>
-                <a:ea typeface="Arial" pitchFamily="34" charset="-122"/>
-                <a:cs typeface="Arial" pitchFamily="34" charset="-120"/>
-              </a:rPr>
-              <a:t>Fame, youth and beauty hurry by.</a:t>
-            </a:r>
-            <a:endParaRPr lang="en-US" sz="4000" dirty="0"/>
-          </a:p>
-          <a:p>
-            <a:pPr algn="ctr" indent="0" marL="0">
-              <a:buNone/>
-            </a:pPr>
-            <a:r>
-              <a:rPr lang="en-US" sz="4000" b="1" dirty="0">
-                <a:solidFill>
-                  <a:srgbClr val="FFFFFF"/>
-                </a:solidFill>
-                <a:latin typeface="Arial" pitchFamily="34" charset="0"/>
-                <a:ea typeface="Arial" pitchFamily="34" charset="-122"/>
-                <a:cs typeface="Arial" pitchFamily="34" charset="-120"/>
-              </a:rPr>
-              <a:t>But life eternal calls to us, at the cross.</a:t>
-            </a:r>
-            <a:endParaRPr lang="en-US" sz="4000" dirty="0"/>
+              <a:rPr lang="en-US" sz="4800" b="1" i="1" dirty="0">
+                <a:solidFill>
+                  <a:srgbClr val="FFFFFF"/>
+                </a:solidFill>
+                <a:latin typeface="Arial" pitchFamily="34" charset="0"/>
+                <a:ea typeface="Arial" pitchFamily="34" charset="-122"/>
+                <a:cs typeface="Arial" pitchFamily="34" charset="-120"/>
+              </a:rPr>
+              <a:t>I rejoice in my Redeemer,</a:t>
+            </a:r>
+            <a:endParaRPr lang="en-US" sz="4800" dirty="0"/>
+          </a:p>
+          <a:p>
+            <a:pPr algn="ctr" indent="0" marL="0">
+              <a:buNone/>
+            </a:pPr>
+            <a:r>
+              <a:rPr lang="en-US" sz="4800" b="1" i="1" dirty="0">
+                <a:solidFill>
+                  <a:srgbClr val="FFFFFF"/>
+                </a:solidFill>
+                <a:latin typeface="Arial" pitchFamily="34" charset="0"/>
+                <a:ea typeface="Arial" pitchFamily="34" charset="-122"/>
+                <a:cs typeface="Arial" pitchFamily="34" charset="-120"/>
+              </a:rPr>
+              <a:t>Greatest Treasure, Wellspring of my soul.</a:t>
+            </a:r>
+            <a:endParaRPr lang="en-US" sz="4800" dirty="0"/>
+          </a:p>
+          <a:p>
+            <a:pPr algn="ctr" indent="0" marL="0">
+              <a:buNone/>
+            </a:pPr>
+            <a:r>
+              <a:rPr lang="en-US" sz="4800" b="1" i="1" dirty="0">
+                <a:solidFill>
+                  <a:srgbClr val="FFFFFF"/>
+                </a:solidFill>
+                <a:latin typeface="Arial" pitchFamily="34" charset="0"/>
+                <a:ea typeface="Arial" pitchFamily="34" charset="-122"/>
+                <a:cs typeface="Arial" pitchFamily="34" charset="-120"/>
+              </a:rPr>
+              <a:t>I will trust in Him, no other,</a:t>
+            </a:r>
+            <a:endParaRPr lang="en-US" sz="4800" dirty="0"/>
+          </a:p>
+          <a:p>
+            <a:pPr algn="ctr" indent="0" marL="0">
+              <a:buNone/>
+            </a:pPr>
+            <a:r>
+              <a:rPr lang="en-US" sz="4800" b="1" i="1" dirty="0">
+                <a:solidFill>
+                  <a:srgbClr val="FFFFFF"/>
+                </a:solidFill>
+                <a:latin typeface="Arial" pitchFamily="34" charset="0"/>
+                <a:ea typeface="Arial" pitchFamily="34" charset="-122"/>
+                <a:cs typeface="Arial" pitchFamily="34" charset="-120"/>
+              </a:rPr>
+              <a:t>my soul is satisfied in Him alone.</a:t>
+            </a:r>
+            <a:endParaRPr lang="en-US" sz="4800" dirty="0"/>
           </a:p>
         </p:txBody>
       </p:sp>
@@ -2049,51 +2260,51 @@
               <a:buNone/>
             </a:pPr>
             <a:r>
-              <a:rPr lang="en-US" sz="4000" b="1" dirty="0">
-                <a:solidFill>
-                  <a:srgbClr val="FFFFFF"/>
-                </a:solidFill>
-                <a:latin typeface="Arial" pitchFamily="34" charset="0"/>
-                <a:ea typeface="Arial" pitchFamily="34" charset="-122"/>
-                <a:cs typeface="Arial" pitchFamily="34" charset="-120"/>
-              </a:rPr>
-              <a:t>I will not boast in wealth or might,</a:t>
-            </a:r>
-            <a:endParaRPr lang="en-US" sz="4000" dirty="0"/>
-          </a:p>
-          <a:p>
-            <a:pPr algn="ctr" indent="0" marL="0">
-              <a:buNone/>
-            </a:pPr>
-            <a:r>
-              <a:rPr lang="en-US" sz="4000" b="1" dirty="0">
-                <a:solidFill>
-                  <a:srgbClr val="FFFFFF"/>
-                </a:solidFill>
-                <a:latin typeface="Arial" pitchFamily="34" charset="0"/>
-                <a:ea typeface="Arial" pitchFamily="34" charset="-122"/>
-                <a:cs typeface="Arial" pitchFamily="34" charset="-120"/>
-              </a:rPr>
-              <a:t>or human wisdom’s fleeting light.</a:t>
-            </a:r>
-            <a:endParaRPr lang="en-US" sz="4000" dirty="0"/>
-          </a:p>
-          <a:p>
-            <a:pPr algn="ctr" indent="0" marL="0">
-              <a:buNone/>
-            </a:pPr>
-            <a:r>
-              <a:rPr lang="en-US" sz="4000" b="1" dirty="0">
-                <a:solidFill>
-                  <a:srgbClr val="FFFFFF"/>
-                </a:solidFill>
-                <a:latin typeface="Arial" pitchFamily="34" charset="0"/>
-                <a:ea typeface="Arial" pitchFamily="34" charset="-122"/>
-                <a:cs typeface="Arial" pitchFamily="34" charset="-120"/>
-              </a:rPr>
-              <a:t>But I will boast in knowing Christ, at the cross.</a:t>
-            </a:r>
-            <a:endParaRPr lang="en-US" sz="4000" dirty="0"/>
+              <a:rPr lang="en-US" sz="4800" b="1" dirty="0">
+                <a:solidFill>
+                  <a:srgbClr val="FFFFFF"/>
+                </a:solidFill>
+                <a:latin typeface="Arial" pitchFamily="34" charset="0"/>
+                <a:ea typeface="Arial" pitchFamily="34" charset="-122"/>
+                <a:cs typeface="Arial" pitchFamily="34" charset="-120"/>
+              </a:rPr>
+              <a:t>As summer flowers we fade and die.</a:t>
+            </a:r>
+            <a:endParaRPr lang="en-US" sz="4800" dirty="0"/>
+          </a:p>
+          <a:p>
+            <a:pPr algn="ctr" indent="0" marL="0">
+              <a:buNone/>
+            </a:pPr>
+            <a:r>
+              <a:rPr lang="en-US" sz="4800" b="1" dirty="0">
+                <a:solidFill>
+                  <a:srgbClr val="FFFFFF"/>
+                </a:solidFill>
+                <a:latin typeface="Arial" pitchFamily="34" charset="0"/>
+                <a:ea typeface="Arial" pitchFamily="34" charset="-122"/>
+                <a:cs typeface="Arial" pitchFamily="34" charset="-120"/>
+              </a:rPr>
+              <a:t>Fame, youth and beauty hurry by.</a:t>
+            </a:r>
+            <a:endParaRPr lang="en-US" sz="4800" dirty="0"/>
+          </a:p>
+          <a:p>
+            <a:pPr algn="ctr" indent="0" marL="0">
+              <a:buNone/>
+            </a:pPr>
+            <a:r>
+              <a:rPr lang="en-US" sz="4800" b="1" dirty="0">
+                <a:solidFill>
+                  <a:srgbClr val="FFFFFF"/>
+                </a:solidFill>
+                <a:latin typeface="Arial" pitchFamily="34" charset="0"/>
+                <a:ea typeface="Arial" pitchFamily="34" charset="-122"/>
+                <a:cs typeface="Arial" pitchFamily="34" charset="-120"/>
+              </a:rPr>
+              <a:t>But life eternal calls to us, at the cross.</a:t>
+            </a:r>
+            <a:endParaRPr lang="en-US" sz="4800" dirty="0"/>
           </a:p>
         </p:txBody>
       </p:sp>
@@ -2154,68 +2365,51 @@
               <a:buNone/>
             </a:pPr>
             <a:r>
-              <a:rPr lang="en-US" sz="4000" b="1" i="1" dirty="0">
-                <a:solidFill>
-                  <a:srgbClr val="FFFFFF"/>
-                </a:solidFill>
-                <a:latin typeface="Arial" pitchFamily="34" charset="0"/>
-                <a:ea typeface="Arial" pitchFamily="34" charset="-122"/>
-                <a:cs typeface="Arial" pitchFamily="34" charset="-120"/>
-              </a:rPr>
-              <a:t>I rejoice in my Redeemer,</a:t>
-            </a:r>
-            <a:endParaRPr lang="en-US" sz="4000" dirty="0"/>
-          </a:p>
-          <a:p>
-            <a:pPr algn="ctr" indent="0" marL="0">
-              <a:buNone/>
-            </a:pPr>
-            <a:r>
-              <a:rPr lang="en-US" sz="4000" b="1" i="1" dirty="0">
-                <a:solidFill>
-                  <a:srgbClr val="FFFFFF"/>
-                </a:solidFill>
-                <a:latin typeface="Arial" pitchFamily="34" charset="0"/>
-                <a:ea typeface="Arial" pitchFamily="34" charset="-122"/>
-                <a:cs typeface="Arial" pitchFamily="34" charset="-120"/>
-              </a:rPr>
-              <a:t>Greatest Treasure, Wellspring of my soul.</a:t>
-            </a:r>
-            <a:endParaRPr lang="en-US" sz="4000" dirty="0"/>
-          </a:p>
-          <a:p>
-            <a:pPr algn="ctr" indent="0" marL="0">
-              <a:buNone/>
-            </a:pPr>
-            <a:r>
-              <a:rPr lang="en-US" sz="4000" b="1" i="1" dirty="0">
-                <a:solidFill>
-                  <a:srgbClr val="FFFFFF"/>
-                </a:solidFill>
-                <a:latin typeface="Arial" pitchFamily="34" charset="0"/>
-                <a:ea typeface="Arial" pitchFamily="34" charset="-122"/>
-                <a:cs typeface="Arial" pitchFamily="34" charset="-120"/>
-              </a:rPr>
-              <a:t>I will trust in Him, no other,</a:t>
-            </a:r>
-            <a:endParaRPr lang="en-US" sz="4000" dirty="0"/>
-          </a:p>
-          <a:p>
-            <a:pPr algn="ctr" indent="0" marL="0">
-              <a:buNone/>
-            </a:pPr>
-            <a:r>
-              <a:rPr lang="en-US" sz="4000" b="1" i="1" dirty="0">
-                <a:solidFill>
-                  <a:srgbClr val="FFFFFF"/>
-                </a:solidFill>
-                <a:latin typeface="Arial" pitchFamily="34" charset="0"/>
-                <a:ea typeface="Arial" pitchFamily="34" charset="-122"/>
-                <a:cs typeface="Arial" pitchFamily="34" charset="-120"/>
-              </a:rPr>
-              <a:t>my soul is satisfied in Him alone.</a:t>
-            </a:r>
-            <a:endParaRPr lang="en-US" sz="4000" dirty="0"/>
+              <a:rPr lang="en-US" sz="4800" b="1" dirty="0">
+                <a:solidFill>
+                  <a:srgbClr val="FFFFFF"/>
+                </a:solidFill>
+                <a:latin typeface="Arial" pitchFamily="34" charset="0"/>
+                <a:ea typeface="Arial" pitchFamily="34" charset="-122"/>
+                <a:cs typeface="Arial" pitchFamily="34" charset="-120"/>
+              </a:rPr>
+              <a:t>I will not boast in wealth or might,</a:t>
+            </a:r>
+            <a:endParaRPr lang="en-US" sz="4800" dirty="0"/>
+          </a:p>
+          <a:p>
+            <a:pPr algn="ctr" indent="0" marL="0">
+              <a:buNone/>
+            </a:pPr>
+            <a:r>
+              <a:rPr lang="en-US" sz="4800" b="1" dirty="0">
+                <a:solidFill>
+                  <a:srgbClr val="FFFFFF"/>
+                </a:solidFill>
+                <a:latin typeface="Arial" pitchFamily="34" charset="0"/>
+                <a:ea typeface="Arial" pitchFamily="34" charset="-122"/>
+                <a:cs typeface="Arial" pitchFamily="34" charset="-120"/>
+              </a:rPr>
+              <a:t>or human wisdom’s fleeting light.</a:t>
+            </a:r>
+            <a:endParaRPr lang="en-US" sz="4800" dirty="0"/>
+          </a:p>
+          <a:p>
+            <a:pPr algn="ctr" indent="0" marL="0">
+              <a:buNone/>
+            </a:pPr>
+            <a:r>
+              <a:rPr lang="en-US" sz="4800" b="1" dirty="0">
+                <a:solidFill>
+                  <a:srgbClr val="FFFFFF"/>
+                </a:solidFill>
+                <a:latin typeface="Arial" pitchFamily="34" charset="0"/>
+                <a:ea typeface="Arial" pitchFamily="34" charset="-122"/>
+                <a:cs typeface="Arial" pitchFamily="34" charset="-120"/>
+              </a:rPr>
+              <a:t>But I will boast in knowing Christ, at the cross.</a:t>
+            </a:r>
+            <a:endParaRPr lang="en-US" sz="4800" dirty="0"/>
           </a:p>
         </p:txBody>
       </p:sp>
@@ -2276,51 +2470,68 @@
               <a:buNone/>
             </a:pPr>
             <a:r>
-              <a:rPr lang="en-US" sz="4000" b="1" dirty="0">
-                <a:solidFill>
-                  <a:srgbClr val="FFFFFF"/>
-                </a:solidFill>
-                <a:latin typeface="Arial" pitchFamily="34" charset="0"/>
-                <a:ea typeface="Arial" pitchFamily="34" charset="-122"/>
-                <a:cs typeface="Arial" pitchFamily="34" charset="-120"/>
-              </a:rPr>
-              <a:t>Two wonders here that I confess:</a:t>
-            </a:r>
-            <a:endParaRPr lang="en-US" sz="4000" dirty="0"/>
-          </a:p>
-          <a:p>
-            <a:pPr algn="ctr" indent="0" marL="0">
-              <a:buNone/>
-            </a:pPr>
-            <a:r>
-              <a:rPr lang="en-US" sz="4000" b="1" dirty="0">
-                <a:solidFill>
-                  <a:srgbClr val="FFFFFF"/>
-                </a:solidFill>
-                <a:latin typeface="Arial" pitchFamily="34" charset="0"/>
-                <a:ea typeface="Arial" pitchFamily="34" charset="-122"/>
-                <a:cs typeface="Arial" pitchFamily="34" charset="-120"/>
-              </a:rPr>
-              <a:t>my worth and my unworthiness.</a:t>
-            </a:r>
-            <a:endParaRPr lang="en-US" sz="4000" dirty="0"/>
-          </a:p>
-          <a:p>
-            <a:pPr algn="ctr" indent="0" marL="0">
-              <a:buNone/>
-            </a:pPr>
-            <a:r>
-              <a:rPr lang="en-US" sz="4000" b="1" dirty="0">
-                <a:solidFill>
-                  <a:srgbClr val="FFFFFF"/>
-                </a:solidFill>
-                <a:latin typeface="Arial" pitchFamily="34" charset="0"/>
-                <a:ea typeface="Arial" pitchFamily="34" charset="-122"/>
-                <a:cs typeface="Arial" pitchFamily="34" charset="-120"/>
-              </a:rPr>
-              <a:t>My value fixed – my ransom paid at the cross.</a:t>
-            </a:r>
-            <a:endParaRPr lang="en-US" sz="4000" dirty="0"/>
+              <a:rPr lang="en-US" sz="4800" b="1" i="1" dirty="0">
+                <a:solidFill>
+                  <a:srgbClr val="FFFFFF"/>
+                </a:solidFill>
+                <a:latin typeface="Arial" pitchFamily="34" charset="0"/>
+                <a:ea typeface="Arial" pitchFamily="34" charset="-122"/>
+                <a:cs typeface="Arial" pitchFamily="34" charset="-120"/>
+              </a:rPr>
+              <a:t>I rejoice in my Redeemer,</a:t>
+            </a:r>
+            <a:endParaRPr lang="en-US" sz="4800" dirty="0"/>
+          </a:p>
+          <a:p>
+            <a:pPr algn="ctr" indent="0" marL="0">
+              <a:buNone/>
+            </a:pPr>
+            <a:r>
+              <a:rPr lang="en-US" sz="4800" b="1" i="1" dirty="0">
+                <a:solidFill>
+                  <a:srgbClr val="FFFFFF"/>
+                </a:solidFill>
+                <a:latin typeface="Arial" pitchFamily="34" charset="0"/>
+                <a:ea typeface="Arial" pitchFamily="34" charset="-122"/>
+                <a:cs typeface="Arial" pitchFamily="34" charset="-120"/>
+              </a:rPr>
+              <a:t>Greatest Treasure, Wellspring of my soul.</a:t>
+            </a:r>
+            <a:endParaRPr lang="en-US" sz="4800" dirty="0"/>
+          </a:p>
+          <a:p>
+            <a:pPr algn="ctr" indent="0" marL="0">
+              <a:buNone/>
+            </a:pPr>
+            <a:r>
+              <a:rPr lang="en-US" sz="4800" b="1" i="1" dirty="0">
+                <a:solidFill>
+                  <a:srgbClr val="FFFFFF"/>
+                </a:solidFill>
+                <a:latin typeface="Arial" pitchFamily="34" charset="0"/>
+                <a:ea typeface="Arial" pitchFamily="34" charset="-122"/>
+                <a:cs typeface="Arial" pitchFamily="34" charset="-120"/>
+              </a:rPr>
+              <a:t>I will trust in Him, no other,</a:t>
+            </a:r>
+            <a:endParaRPr lang="en-US" sz="4800" dirty="0"/>
+          </a:p>
+          <a:p>
+            <a:pPr algn="ctr" indent="0" marL="0">
+              <a:buNone/>
+            </a:pPr>
+            <a:r>
+              <a:rPr lang="en-US" sz="4800" b="1" i="1" dirty="0">
+                <a:solidFill>
+                  <a:srgbClr val="FFFFFF"/>
+                </a:solidFill>
+                <a:latin typeface="Arial" pitchFamily="34" charset="0"/>
+                <a:ea typeface="Arial" pitchFamily="34" charset="-122"/>
+                <a:cs typeface="Arial" pitchFamily="34" charset="-120"/>
+              </a:rPr>
+              <a:t>my soul is satisfied in Him alone.</a:t>
+            </a:r>
+            <a:endParaRPr lang="en-US" sz="4800" dirty="0"/>
           </a:p>
         </p:txBody>
       </p:sp>
@@ -2381,68 +2592,51 @@
               <a:buNone/>
             </a:pPr>
             <a:r>
-              <a:rPr lang="en-US" sz="4000" b="1" i="1" dirty="0">
-                <a:solidFill>
-                  <a:srgbClr val="FFFFFF"/>
-                </a:solidFill>
-                <a:latin typeface="Arial" pitchFamily="34" charset="0"/>
-                <a:ea typeface="Arial" pitchFamily="34" charset="-122"/>
-                <a:cs typeface="Arial" pitchFamily="34" charset="-120"/>
-              </a:rPr>
-              <a:t>I rejoice in my Redeemer,</a:t>
-            </a:r>
-            <a:endParaRPr lang="en-US" sz="4000" dirty="0"/>
-          </a:p>
-          <a:p>
-            <a:pPr algn="ctr" indent="0" marL="0">
-              <a:buNone/>
-            </a:pPr>
-            <a:r>
-              <a:rPr lang="en-US" sz="4000" b="1" i="1" dirty="0">
-                <a:solidFill>
-                  <a:srgbClr val="FFFFFF"/>
-                </a:solidFill>
-                <a:latin typeface="Arial" pitchFamily="34" charset="0"/>
-                <a:ea typeface="Arial" pitchFamily="34" charset="-122"/>
-                <a:cs typeface="Arial" pitchFamily="34" charset="-120"/>
-              </a:rPr>
-              <a:t>Greatest Treasure, Wellspring of my soul.</a:t>
-            </a:r>
-            <a:endParaRPr lang="en-US" sz="4000" dirty="0"/>
-          </a:p>
-          <a:p>
-            <a:pPr algn="ctr" indent="0" marL="0">
-              <a:buNone/>
-            </a:pPr>
-            <a:r>
-              <a:rPr lang="en-US" sz="4000" b="1" i="1" dirty="0">
-                <a:solidFill>
-                  <a:srgbClr val="FFFFFF"/>
-                </a:solidFill>
-                <a:latin typeface="Arial" pitchFamily="34" charset="0"/>
-                <a:ea typeface="Arial" pitchFamily="34" charset="-122"/>
-                <a:cs typeface="Arial" pitchFamily="34" charset="-120"/>
-              </a:rPr>
-              <a:t>I will trust in Him, no other,</a:t>
-            </a:r>
-            <a:endParaRPr lang="en-US" sz="4000" dirty="0"/>
-          </a:p>
-          <a:p>
-            <a:pPr algn="ctr" indent="0" marL="0">
-              <a:buNone/>
-            </a:pPr>
-            <a:r>
-              <a:rPr lang="en-US" sz="4000" b="1" i="1" dirty="0">
-                <a:solidFill>
-                  <a:srgbClr val="FFFFFF"/>
-                </a:solidFill>
-                <a:latin typeface="Arial" pitchFamily="34" charset="0"/>
-                <a:ea typeface="Arial" pitchFamily="34" charset="-122"/>
-                <a:cs typeface="Arial" pitchFamily="34" charset="-120"/>
-              </a:rPr>
-              <a:t>my soul is satisfied in Him alone.</a:t>
-            </a:r>
-            <a:endParaRPr lang="en-US" sz="4000" dirty="0"/>
+              <a:rPr lang="en-US" sz="4800" b="1" dirty="0">
+                <a:solidFill>
+                  <a:srgbClr val="FFFFFF"/>
+                </a:solidFill>
+                <a:latin typeface="Arial" pitchFamily="34" charset="0"/>
+                <a:ea typeface="Arial" pitchFamily="34" charset="-122"/>
+                <a:cs typeface="Arial" pitchFamily="34" charset="-120"/>
+              </a:rPr>
+              <a:t>Two wonders here that I confess:</a:t>
+            </a:r>
+            <a:endParaRPr lang="en-US" sz="4800" dirty="0"/>
+          </a:p>
+          <a:p>
+            <a:pPr algn="ctr" indent="0" marL="0">
+              <a:buNone/>
+            </a:pPr>
+            <a:r>
+              <a:rPr lang="en-US" sz="4800" b="1" dirty="0">
+                <a:solidFill>
+                  <a:srgbClr val="FFFFFF"/>
+                </a:solidFill>
+                <a:latin typeface="Arial" pitchFamily="34" charset="0"/>
+                <a:ea typeface="Arial" pitchFamily="34" charset="-122"/>
+                <a:cs typeface="Arial" pitchFamily="34" charset="-120"/>
+              </a:rPr>
+              <a:t>my worth and my unworthiness.</a:t>
+            </a:r>
+            <a:endParaRPr lang="en-US" sz="4800" dirty="0"/>
+          </a:p>
+          <a:p>
+            <a:pPr algn="ctr" indent="0" marL="0">
+              <a:buNone/>
+            </a:pPr>
+            <a:r>
+              <a:rPr lang="en-US" sz="4800" b="1" dirty="0">
+                <a:solidFill>
+                  <a:srgbClr val="FFFFFF"/>
+                </a:solidFill>
+                <a:latin typeface="Arial" pitchFamily="34" charset="0"/>
+                <a:ea typeface="Arial" pitchFamily="34" charset="-122"/>
+                <a:cs typeface="Arial" pitchFamily="34" charset="-120"/>
+              </a:rPr>
+              <a:t>My value fixed – my ransom paid at the cross.</a:t>
+            </a:r>
+            <a:endParaRPr lang="en-US" sz="4800" dirty="0"/>
           </a:p>
         </p:txBody>
       </p:sp>
@@ -2503,7 +2697,7 @@
               <a:buNone/>
             </a:pPr>
             <a:r>
-              <a:rPr lang="en-US" sz="4000" b="1" i="1" dirty="0">
+              <a:rPr lang="en-US" sz="4800" b="1" i="1" dirty="0">
                 <a:solidFill>
                   <a:srgbClr val="FFFFFF"/>
                 </a:solidFill>
@@ -2513,14 +2707,14 @@
               </a:rPr>
               <a:t>I rejoice in my Redeemer,</a:t>
             </a:r>
-            <a:endParaRPr lang="en-US" sz="4000" dirty="0"/>
-          </a:p>
-          <a:p>
-            <a:pPr algn="ctr" indent="0" marL="0">
-              <a:buNone/>
-            </a:pPr>
-            <a:r>
-              <a:rPr lang="en-US" sz="4000" b="1" i="1" dirty="0">
+            <a:endParaRPr lang="en-US" sz="4800" dirty="0"/>
+          </a:p>
+          <a:p>
+            <a:pPr algn="ctr" indent="0" marL="0">
+              <a:buNone/>
+            </a:pPr>
+            <a:r>
+              <a:rPr lang="en-US" sz="4800" b="1" i="1" dirty="0">
                 <a:solidFill>
                   <a:srgbClr val="FFFFFF"/>
                 </a:solidFill>
@@ -2530,14 +2724,14 @@
               </a:rPr>
               <a:t>Greatest Treasure, Wellspring of my soul.</a:t>
             </a:r>
-            <a:endParaRPr lang="en-US" sz="4000" dirty="0"/>
-          </a:p>
-          <a:p>
-            <a:pPr algn="ctr" indent="0" marL="0">
-              <a:buNone/>
-            </a:pPr>
-            <a:r>
-              <a:rPr lang="en-US" sz="4000" b="1" i="1" dirty="0">
+            <a:endParaRPr lang="en-US" sz="4800" dirty="0"/>
+          </a:p>
+          <a:p>
+            <a:pPr algn="ctr" indent="0" marL="0">
+              <a:buNone/>
+            </a:pPr>
+            <a:r>
+              <a:rPr lang="en-US" sz="4800" b="1" i="1" dirty="0">
                 <a:solidFill>
                   <a:srgbClr val="FFFFFF"/>
                 </a:solidFill>
@@ -2547,58 +2741,24 @@
               </a:rPr>
               <a:t>I will trust in Him, no other,</a:t>
             </a:r>
-            <a:endParaRPr lang="en-US" sz="4000" dirty="0"/>
-          </a:p>
-          <a:p>
-            <a:pPr algn="ctr" indent="0" marL="0">
-              <a:buNone/>
-            </a:pPr>
-            <a:r>
-              <a:rPr lang="en-US" sz="4000" b="1" i="1" dirty="0">
-                <a:solidFill>
-                  <a:srgbClr val="FFFFFF"/>
-                </a:solidFill>
-                <a:latin typeface="Arial" pitchFamily="34" charset="0"/>
-                <a:ea typeface="Arial" pitchFamily="34" charset="-122"/>
-                <a:cs typeface="Arial" pitchFamily="34" charset="-120"/>
-              </a:rPr>
-              <a:t>My soul is satisfied in Him alone.</a:t>
-            </a:r>
-            <a:endParaRPr lang="en-US" sz="4000" dirty="0"/>
-          </a:p>
-          <a:p>
-            <a:pPr algn="ctr" indent="0" marL="0">
-              <a:buNone/>
-            </a:pPr>
-            <a:r>
-              <a:rPr lang="en-US" sz="4000" b="1" i="1" dirty="0">
-                <a:solidFill>
-                  <a:srgbClr val="FFFFFF"/>
-                </a:solidFill>
-                <a:latin typeface="Arial" pitchFamily="34" charset="0"/>
-                <a:ea typeface="Arial" pitchFamily="34" charset="-122"/>
-                <a:cs typeface="Arial" pitchFamily="34" charset="-120"/>
-              </a:rPr>
-              <a:t>My soul is satisfied in Him alone.</a:t>
-            </a:r>
-            <a:endParaRPr lang="en-US" sz="4000" dirty="0"/>
-          </a:p>
-          <a:p>
-            <a:pPr algn="ctr" indent="0" marL="0">
-              <a:buNone/>
-            </a:pPr>
-            <a:r>
-              <a:rPr lang="en-US" sz="4000" b="1" i="1" dirty="0">
-                <a:solidFill>
-                  <a:srgbClr val="FFFFFF"/>
-                </a:solidFill>
-                <a:latin typeface="Arial" pitchFamily="34" charset="0"/>
-                <a:ea typeface="Arial" pitchFamily="34" charset="-122"/>
-                <a:cs typeface="Arial" pitchFamily="34" charset="-120"/>
-              </a:rPr>
-              <a:t>***</a:t>
-            </a:r>
-            <a:endParaRPr lang="en-US" sz="4000" dirty="0"/>
+            <a:endParaRPr lang="en-US" sz="4800" dirty="0"/>
+          </a:p>
+          <a:p>
+            <a:pPr algn="ctr" indent="0" marL="0">
+              <a:buNone/>
+            </a:pPr>
+            <a:r>
+              <a:rPr lang="en-US" sz="4800" b="1" i="1" dirty="0">
+                <a:solidFill>
+                  <a:srgbClr val="FFFFFF"/>
+                </a:solidFill>
+                <a:latin typeface="Arial" pitchFamily="34" charset="0"/>
+                <a:ea typeface="Arial" pitchFamily="34" charset="-122"/>
+                <a:cs typeface="Arial" pitchFamily="34" charset="-120"/>
+              </a:rPr>
+              <a:t>my soul is satisfied in Him alone.</a:t>
+            </a:r>
+            <a:endParaRPr lang="en-US" sz="4800" dirty="0"/>
           </a:p>
         </p:txBody>
       </p:sp>

--- a/fubc-en/5-My Worth Is Not In What I Own.pptx
+++ b/fubc-en/5-My Worth Is Not In What I Own.pptx
@@ -15,9 +15,13 @@
     <p:sldId id="263" r:id="rId9"/>
     <p:sldId id="264" r:id="rId10"/>
     <p:sldId id="265" r:id="rId11"/>
+    <p:sldId id="266" r:id="rId12"/>
+    <p:sldId id="267" r:id="rId13"/>
+    <p:sldId id="268" r:id="rId14"/>
+    <p:sldId id="269" r:id="rId15"/>
   </p:sldIdLst>
   <p:notesMasterIdLst>
-    <p:notesMasterId r:id="rId12"/>
+    <p:notesMasterId r:id="rId16"/>
   </p:notesMasterIdLst>
   <p:sldSz cx="12192000" cy="6858000"/>
   <p:notesSz cx="6858000" cy="12192000"/>
@@ -623,6 +627,358 @@
             <a:fld id="{F7021451-1387-4CA6-816F-3879F97B5CBC}" type="slidenum">
               <a:rPr lang="en-US"/>
               <a:t>10</a:t>
+            </a:fld>
+            <a:endParaRPr lang="en-US"/>
+          </a:p>
+        </p:txBody>
+      </p:sp>
+    </p:spTree>
+    <p:extLst>
+      <p:ext uri="{BB962C8B-B14F-4D97-AF65-F5344CB8AC3E}">
+        <p14:creationId xmlns:p14="http://schemas.microsoft.com/office/powerpoint/2010/main" val="1024086991"/>
+      </p:ext>
+    </p:extLst>
+  </p:cSld>
+  <p:clrMapOvr>
+    <a:masterClrMapping/>
+  </p:clrMapOvr>
+</p:notes>
+</file>
+
+<file path=ppt/notesSlides/notesSlide11.xml><?xml version="1.0" encoding="utf-8"?>
+<p:notes xmlns:a="http://schemas.openxmlformats.org/drawingml/2006/main" xmlns:r="http://schemas.openxmlformats.org/officeDocument/2006/relationships" xmlns:p="http://schemas.openxmlformats.org/presentationml/2006/main">
+  <p:cSld>
+    <p:spTree>
+      <p:nvGrpSpPr>
+        <p:cNvPr id="1" name=""/>
+        <p:cNvGrpSpPr/>
+        <p:nvPr/>
+      </p:nvGrpSpPr>
+      <p:grpSpPr>
+        <a:xfrm>
+          <a:off x="0" y="0"/>
+          <a:ext cx="0" cy="0"/>
+          <a:chOff x="0" y="0"/>
+          <a:chExt cx="0" cy="0"/>
+        </a:xfrm>
+      </p:grpSpPr>
+      <p:sp>
+        <p:nvSpPr>
+          <p:cNvPr id="2" name="Slide Image Placeholder 1"/>
+          <p:cNvSpPr>
+            <a:spLocks noGrp="1" noRot="1" noChangeAspect="1"/>
+          </p:cNvSpPr>
+          <p:nvPr>
+            <p:ph type="sldImg"/>
+          </p:nvPr>
+        </p:nvSpPr>
+        <p:spPr/>
+      </p:sp>
+      <p:sp>
+        <p:nvSpPr>
+          <p:cNvPr id="3" name="Notes Placeholder 2"/>
+          <p:cNvSpPr>
+            <a:spLocks noGrp="1"/>
+          </p:cNvSpPr>
+          <p:nvPr>
+            <p:ph type="body" idx="1"/>
+          </p:nvPr>
+        </p:nvSpPr>
+        <p:spPr/>
+        <p:txBody>
+          <a:bodyPr/>
+          <a:lstStyle/>
+          <a:p>
+            <a:r>
+              <a:rPr lang="en-US" dirty="0"/>
+              <a:t/>
+            </a:r>
+            <a:endParaRPr lang="en-US" dirty="0"/>
+          </a:p>
+        </p:txBody>
+      </p:sp>
+      <p:sp>
+        <p:nvSpPr>
+          <p:cNvPr id="4" name="Slide Number Placeholder 3"/>
+          <p:cNvSpPr>
+            <a:spLocks noGrp="1"/>
+          </p:cNvSpPr>
+          <p:nvPr>
+            <p:ph type="sldNum" sz="quarter" idx="10"/>
+          </p:nvPr>
+        </p:nvSpPr>
+        <p:spPr/>
+        <p:txBody>
+          <a:bodyPr/>
+          <a:lstStyle/>
+          <a:p>
+            <a:fld id="{F7021451-1387-4CA6-816F-3879F97B5CBC}" type="slidenum">
+              <a:rPr lang="en-US"/>
+              <a:t>11</a:t>
+            </a:fld>
+            <a:endParaRPr lang="en-US"/>
+          </a:p>
+        </p:txBody>
+      </p:sp>
+    </p:spTree>
+    <p:extLst>
+      <p:ext uri="{BB962C8B-B14F-4D97-AF65-F5344CB8AC3E}">
+        <p14:creationId xmlns:p14="http://schemas.microsoft.com/office/powerpoint/2010/main" val="1024086991"/>
+      </p:ext>
+    </p:extLst>
+  </p:cSld>
+  <p:clrMapOvr>
+    <a:masterClrMapping/>
+  </p:clrMapOvr>
+</p:notes>
+</file>
+
+<file path=ppt/notesSlides/notesSlide12.xml><?xml version="1.0" encoding="utf-8"?>
+<p:notes xmlns:a="http://schemas.openxmlformats.org/drawingml/2006/main" xmlns:r="http://schemas.openxmlformats.org/officeDocument/2006/relationships" xmlns:p="http://schemas.openxmlformats.org/presentationml/2006/main">
+  <p:cSld>
+    <p:spTree>
+      <p:nvGrpSpPr>
+        <p:cNvPr id="1" name=""/>
+        <p:cNvGrpSpPr/>
+        <p:nvPr/>
+      </p:nvGrpSpPr>
+      <p:grpSpPr>
+        <a:xfrm>
+          <a:off x="0" y="0"/>
+          <a:ext cx="0" cy="0"/>
+          <a:chOff x="0" y="0"/>
+          <a:chExt cx="0" cy="0"/>
+        </a:xfrm>
+      </p:grpSpPr>
+      <p:sp>
+        <p:nvSpPr>
+          <p:cNvPr id="2" name="Slide Image Placeholder 1"/>
+          <p:cNvSpPr>
+            <a:spLocks noGrp="1" noRot="1" noChangeAspect="1"/>
+          </p:cNvSpPr>
+          <p:nvPr>
+            <p:ph type="sldImg"/>
+          </p:nvPr>
+        </p:nvSpPr>
+        <p:spPr/>
+      </p:sp>
+      <p:sp>
+        <p:nvSpPr>
+          <p:cNvPr id="3" name="Notes Placeholder 2"/>
+          <p:cNvSpPr>
+            <a:spLocks noGrp="1"/>
+          </p:cNvSpPr>
+          <p:nvPr>
+            <p:ph type="body" idx="1"/>
+          </p:nvPr>
+        </p:nvSpPr>
+        <p:spPr/>
+        <p:txBody>
+          <a:bodyPr/>
+          <a:lstStyle/>
+          <a:p>
+            <a:r>
+              <a:rPr lang="en-US" dirty="0"/>
+              <a:t/>
+            </a:r>
+            <a:endParaRPr lang="en-US" dirty="0"/>
+          </a:p>
+        </p:txBody>
+      </p:sp>
+      <p:sp>
+        <p:nvSpPr>
+          <p:cNvPr id="4" name="Slide Number Placeholder 3"/>
+          <p:cNvSpPr>
+            <a:spLocks noGrp="1"/>
+          </p:cNvSpPr>
+          <p:nvPr>
+            <p:ph type="sldNum" sz="quarter" idx="10"/>
+          </p:nvPr>
+        </p:nvSpPr>
+        <p:spPr/>
+        <p:txBody>
+          <a:bodyPr/>
+          <a:lstStyle/>
+          <a:p>
+            <a:fld id="{F7021451-1387-4CA6-816F-3879F97B5CBC}" type="slidenum">
+              <a:rPr lang="en-US"/>
+              <a:t>12</a:t>
+            </a:fld>
+            <a:endParaRPr lang="en-US"/>
+          </a:p>
+        </p:txBody>
+      </p:sp>
+    </p:spTree>
+    <p:extLst>
+      <p:ext uri="{BB962C8B-B14F-4D97-AF65-F5344CB8AC3E}">
+        <p14:creationId xmlns:p14="http://schemas.microsoft.com/office/powerpoint/2010/main" val="1024086991"/>
+      </p:ext>
+    </p:extLst>
+  </p:cSld>
+  <p:clrMapOvr>
+    <a:masterClrMapping/>
+  </p:clrMapOvr>
+</p:notes>
+</file>
+
+<file path=ppt/notesSlides/notesSlide13.xml><?xml version="1.0" encoding="utf-8"?>
+<p:notes xmlns:a="http://schemas.openxmlformats.org/drawingml/2006/main" xmlns:r="http://schemas.openxmlformats.org/officeDocument/2006/relationships" xmlns:p="http://schemas.openxmlformats.org/presentationml/2006/main">
+  <p:cSld>
+    <p:spTree>
+      <p:nvGrpSpPr>
+        <p:cNvPr id="1" name=""/>
+        <p:cNvGrpSpPr/>
+        <p:nvPr/>
+      </p:nvGrpSpPr>
+      <p:grpSpPr>
+        <a:xfrm>
+          <a:off x="0" y="0"/>
+          <a:ext cx="0" cy="0"/>
+          <a:chOff x="0" y="0"/>
+          <a:chExt cx="0" cy="0"/>
+        </a:xfrm>
+      </p:grpSpPr>
+      <p:sp>
+        <p:nvSpPr>
+          <p:cNvPr id="2" name="Slide Image Placeholder 1"/>
+          <p:cNvSpPr>
+            <a:spLocks noGrp="1" noRot="1" noChangeAspect="1"/>
+          </p:cNvSpPr>
+          <p:nvPr>
+            <p:ph type="sldImg"/>
+          </p:nvPr>
+        </p:nvSpPr>
+        <p:spPr/>
+      </p:sp>
+      <p:sp>
+        <p:nvSpPr>
+          <p:cNvPr id="3" name="Notes Placeholder 2"/>
+          <p:cNvSpPr>
+            <a:spLocks noGrp="1"/>
+          </p:cNvSpPr>
+          <p:nvPr>
+            <p:ph type="body" idx="1"/>
+          </p:nvPr>
+        </p:nvSpPr>
+        <p:spPr/>
+        <p:txBody>
+          <a:bodyPr/>
+          <a:lstStyle/>
+          <a:p>
+            <a:r>
+              <a:rPr lang="en-US" dirty="0"/>
+              <a:t/>
+            </a:r>
+            <a:endParaRPr lang="en-US" dirty="0"/>
+          </a:p>
+        </p:txBody>
+      </p:sp>
+      <p:sp>
+        <p:nvSpPr>
+          <p:cNvPr id="4" name="Slide Number Placeholder 3"/>
+          <p:cNvSpPr>
+            <a:spLocks noGrp="1"/>
+          </p:cNvSpPr>
+          <p:nvPr>
+            <p:ph type="sldNum" sz="quarter" idx="10"/>
+          </p:nvPr>
+        </p:nvSpPr>
+        <p:spPr/>
+        <p:txBody>
+          <a:bodyPr/>
+          <a:lstStyle/>
+          <a:p>
+            <a:fld id="{F7021451-1387-4CA6-816F-3879F97B5CBC}" type="slidenum">
+              <a:rPr lang="en-US"/>
+              <a:t>13</a:t>
+            </a:fld>
+            <a:endParaRPr lang="en-US"/>
+          </a:p>
+        </p:txBody>
+      </p:sp>
+    </p:spTree>
+    <p:extLst>
+      <p:ext uri="{BB962C8B-B14F-4D97-AF65-F5344CB8AC3E}">
+        <p14:creationId xmlns:p14="http://schemas.microsoft.com/office/powerpoint/2010/main" val="1024086991"/>
+      </p:ext>
+    </p:extLst>
+  </p:cSld>
+  <p:clrMapOvr>
+    <a:masterClrMapping/>
+  </p:clrMapOvr>
+</p:notes>
+</file>
+
+<file path=ppt/notesSlides/notesSlide14.xml><?xml version="1.0" encoding="utf-8"?>
+<p:notes xmlns:a="http://schemas.openxmlformats.org/drawingml/2006/main" xmlns:r="http://schemas.openxmlformats.org/officeDocument/2006/relationships" xmlns:p="http://schemas.openxmlformats.org/presentationml/2006/main">
+  <p:cSld>
+    <p:spTree>
+      <p:nvGrpSpPr>
+        <p:cNvPr id="1" name=""/>
+        <p:cNvGrpSpPr/>
+        <p:nvPr/>
+      </p:nvGrpSpPr>
+      <p:grpSpPr>
+        <a:xfrm>
+          <a:off x="0" y="0"/>
+          <a:ext cx="0" cy="0"/>
+          <a:chOff x="0" y="0"/>
+          <a:chExt cx="0" cy="0"/>
+        </a:xfrm>
+      </p:grpSpPr>
+      <p:sp>
+        <p:nvSpPr>
+          <p:cNvPr id="2" name="Slide Image Placeholder 1"/>
+          <p:cNvSpPr>
+            <a:spLocks noGrp="1" noRot="1" noChangeAspect="1"/>
+          </p:cNvSpPr>
+          <p:nvPr>
+            <p:ph type="sldImg"/>
+          </p:nvPr>
+        </p:nvSpPr>
+        <p:spPr/>
+      </p:sp>
+      <p:sp>
+        <p:nvSpPr>
+          <p:cNvPr id="3" name="Notes Placeholder 2"/>
+          <p:cNvSpPr>
+            <a:spLocks noGrp="1"/>
+          </p:cNvSpPr>
+          <p:nvPr>
+            <p:ph type="body" idx="1"/>
+          </p:nvPr>
+        </p:nvSpPr>
+        <p:spPr/>
+        <p:txBody>
+          <a:bodyPr/>
+          <a:lstStyle/>
+          <a:p>
+            <a:r>
+              <a:rPr lang="en-US" dirty="0"/>
+              <a:t/>
+            </a:r>
+            <a:endParaRPr lang="en-US" dirty="0"/>
+          </a:p>
+        </p:txBody>
+      </p:sp>
+      <p:sp>
+        <p:nvSpPr>
+          <p:cNvPr id="4" name="Slide Number Placeholder 3"/>
+          <p:cNvSpPr>
+            <a:spLocks noGrp="1"/>
+          </p:cNvSpPr>
+          <p:nvPr>
+            <p:ph type="sldNum" sz="quarter" idx="10"/>
+          </p:nvPr>
+        </p:nvSpPr>
+        <p:spPr/>
+        <p:txBody>
+          <a:bodyPr/>
+          <a:lstStyle/>
+          <a:p>
+            <a:fld id="{F7021451-1387-4CA6-816F-3879F97B5CBC}" type="slidenum">
+              <a:rPr lang="en-US"/>
+              <a:t>14</a:t>
             </a:fld>
             <a:endParaRPr lang="en-US"/>
           </a:p>
@@ -1772,6 +2128,111 @@
               <a:buNone/>
             </a:pPr>
             <a:r>
+              <a:rPr lang="en-US" sz="4800" b="1" dirty="0">
+                <a:solidFill>
+                  <a:srgbClr val="FFFFFF"/>
+                </a:solidFill>
+                <a:latin typeface="Arial" pitchFamily="34" charset="0"/>
+                <a:ea typeface="Arial" pitchFamily="34" charset="-122"/>
+                <a:cs typeface="Arial" pitchFamily="34" charset="-120"/>
+              </a:rPr>
+              <a:t>Two wonders here that I confess:</a:t>
+            </a:r>
+            <a:endParaRPr lang="en-US" sz="4800" dirty="0"/>
+          </a:p>
+          <a:p>
+            <a:pPr algn="ctr" indent="0" marL="0">
+              <a:buNone/>
+            </a:pPr>
+            <a:r>
+              <a:rPr lang="en-US" sz="4800" b="1" dirty="0">
+                <a:solidFill>
+                  <a:srgbClr val="FFFFFF"/>
+                </a:solidFill>
+                <a:latin typeface="Arial" pitchFamily="34" charset="0"/>
+                <a:ea typeface="Arial" pitchFamily="34" charset="-122"/>
+                <a:cs typeface="Arial" pitchFamily="34" charset="-120"/>
+              </a:rPr>
+              <a:t>my worth and my unworthiness.</a:t>
+            </a:r>
+            <a:endParaRPr lang="en-US" sz="4800" dirty="0"/>
+          </a:p>
+          <a:p>
+            <a:pPr algn="ctr" indent="0" marL="0">
+              <a:buNone/>
+            </a:pPr>
+            <a:r>
+              <a:rPr lang="en-US" sz="4800" b="1" dirty="0">
+                <a:solidFill>
+                  <a:srgbClr val="FFFFFF"/>
+                </a:solidFill>
+                <a:latin typeface="Arial" pitchFamily="34" charset="0"/>
+                <a:ea typeface="Arial" pitchFamily="34" charset="-122"/>
+                <a:cs typeface="Arial" pitchFamily="34" charset="-120"/>
+              </a:rPr>
+              <a:t>My value fixed – my ransom paid at the cross.</a:t>
+            </a:r>
+            <a:endParaRPr lang="en-US" sz="4800" dirty="0"/>
+          </a:p>
+        </p:txBody>
+      </p:sp>
+    </p:spTree>
+  </p:cSld>
+  <p:clrMapOvr>
+    <a:masterClrMapping/>
+  </p:clrMapOvr>
+</p:sld>
+</file>
+
+<file path=ppt/slides/slide11.xml><?xml version="1.0" encoding="utf-8"?>
+<p:sld xmlns:a="http://schemas.openxmlformats.org/drawingml/2006/main" xmlns:r="http://schemas.openxmlformats.org/officeDocument/2006/relationships" xmlns:p="http://schemas.openxmlformats.org/presentationml/2006/main">
+  <p:cSld name="Slide 11">
+    <p:bg>
+      <p:bgPr>
+        <a:solidFill>
+          <a:srgbClr val="000000"/>
+        </a:solidFill>
+      </p:bgPr>
+    </p:bg>
+    <p:spTree>
+      <p:nvGrpSpPr>
+        <p:cNvPr id="1" name=""/>
+        <p:cNvGrpSpPr/>
+        <p:nvPr/>
+      </p:nvGrpSpPr>
+      <p:grpSpPr>
+        <a:xfrm>
+          <a:off x="0" y="0"/>
+          <a:ext cx="0" cy="0"/>
+          <a:chOff x="0" y="0"/>
+          <a:chExt cx="0" cy="0"/>
+        </a:xfrm>
+      </p:grpSpPr>
+      <p:sp>
+        <p:nvSpPr>
+          <p:cNvPr id="2" name="Text 0"/>
+          <p:cNvSpPr txBox="1"/>
+          <p:nvPr/>
+        </p:nvSpPr>
+        <p:spPr>
+          <a:xfrm>
+            <a:off x="548640" y="457200"/>
+            <a:ext cx="11064240" cy="5943600"/>
+          </a:xfrm>
+          <a:prstGeom prst="rect">
+            <a:avLst/>
+          </a:prstGeom>
+          <a:noFill/>
+          <a:ln/>
+        </p:spPr>
+        <p:txBody>
+          <a:bodyPr wrap="square" lIns="0" tIns="0" rIns="0" bIns="0" rtlCol="0" anchor="ctr"/>
+          <a:lstStyle/>
+          <a:p>
+            <a:pPr algn="ctr" indent="0" marL="0">
+              <a:buNone/>
+            </a:pPr>
+            <a:r>
               <a:rPr lang="en-US" sz="4800" b="1" i="1" dirty="0">
                 <a:solidFill>
                   <a:srgbClr val="FFFFFF"/>
@@ -1797,7 +2258,7 @@
                 <a:ea typeface="Arial" pitchFamily="34" charset="-122"/>
                 <a:cs typeface="Arial" pitchFamily="34" charset="-120"/>
               </a:rPr>
-              <a:t>Greatest Treasure, Wellspring of my soul.</a:t>
+              <a:t>Greatest Treasure, </a:t>
             </a:r>
             <a:endParaRPr lang="en-US" sz="4800" dirty="0"/>
           </a:p>
@@ -1814,6 +2275,77 @@
                 <a:ea typeface="Arial" pitchFamily="34" charset="-122"/>
                 <a:cs typeface="Arial" pitchFamily="34" charset="-120"/>
               </a:rPr>
+              <a:t>Wellspring of my soul.</a:t>
+            </a:r>
+            <a:endParaRPr lang="en-US" sz="4800" dirty="0"/>
+          </a:p>
+        </p:txBody>
+      </p:sp>
+    </p:spTree>
+  </p:cSld>
+  <p:clrMapOvr>
+    <a:masterClrMapping/>
+  </p:clrMapOvr>
+</p:sld>
+</file>
+
+<file path=ppt/slides/slide12.xml><?xml version="1.0" encoding="utf-8"?>
+<p:sld xmlns:a="http://schemas.openxmlformats.org/drawingml/2006/main" xmlns:r="http://schemas.openxmlformats.org/officeDocument/2006/relationships" xmlns:p="http://schemas.openxmlformats.org/presentationml/2006/main">
+  <p:cSld name="Slide 12">
+    <p:bg>
+      <p:bgPr>
+        <a:solidFill>
+          <a:srgbClr val="000000"/>
+        </a:solidFill>
+      </p:bgPr>
+    </p:bg>
+    <p:spTree>
+      <p:nvGrpSpPr>
+        <p:cNvPr id="1" name=""/>
+        <p:cNvGrpSpPr/>
+        <p:nvPr/>
+      </p:nvGrpSpPr>
+      <p:grpSpPr>
+        <a:xfrm>
+          <a:off x="0" y="0"/>
+          <a:ext cx="0" cy="0"/>
+          <a:chOff x="0" y="0"/>
+          <a:chExt cx="0" cy="0"/>
+        </a:xfrm>
+      </p:grpSpPr>
+      <p:sp>
+        <p:nvSpPr>
+          <p:cNvPr id="2" name="Text 0"/>
+          <p:cNvSpPr txBox="1"/>
+          <p:nvPr/>
+        </p:nvSpPr>
+        <p:spPr>
+          <a:xfrm>
+            <a:off x="548640" y="457200"/>
+            <a:ext cx="11064240" cy="5943600"/>
+          </a:xfrm>
+          <a:prstGeom prst="rect">
+            <a:avLst/>
+          </a:prstGeom>
+          <a:noFill/>
+          <a:ln/>
+        </p:spPr>
+        <p:txBody>
+          <a:bodyPr wrap="square" lIns="0" tIns="0" rIns="0" bIns="0" rtlCol="0" anchor="ctr"/>
+          <a:lstStyle/>
+          <a:p>
+            <a:pPr algn="ctr" indent="0" marL="0">
+              <a:buNone/>
+            </a:pPr>
+            <a:r>
+              <a:rPr lang="en-US" sz="4800" b="1" i="1" dirty="0">
+                <a:solidFill>
+                  <a:srgbClr val="FFFFFF"/>
+                </a:solidFill>
+                <a:latin typeface="Arial" pitchFamily="34" charset="0"/>
+                <a:ea typeface="Arial" pitchFamily="34" charset="-122"/>
+                <a:cs typeface="Arial" pitchFamily="34" charset="-120"/>
+              </a:rPr>
               <a:t>I will trust in Him, no other,</a:t>
             </a:r>
             <a:endParaRPr lang="en-US" sz="4800" dirty="0"/>
@@ -1831,6 +2363,199 @@
                 <a:ea typeface="Arial" pitchFamily="34" charset="-122"/>
                 <a:cs typeface="Arial" pitchFamily="34" charset="-120"/>
               </a:rPr>
+              <a:t>my soul is satisfied in Him alone.</a:t>
+            </a:r>
+            <a:endParaRPr lang="en-US" sz="4800" dirty="0"/>
+          </a:p>
+        </p:txBody>
+      </p:sp>
+    </p:spTree>
+  </p:cSld>
+  <p:clrMapOvr>
+    <a:masterClrMapping/>
+  </p:clrMapOvr>
+</p:sld>
+</file>
+
+<file path=ppt/slides/slide13.xml><?xml version="1.0" encoding="utf-8"?>
+<p:sld xmlns:a="http://schemas.openxmlformats.org/drawingml/2006/main" xmlns:r="http://schemas.openxmlformats.org/officeDocument/2006/relationships" xmlns:p="http://schemas.openxmlformats.org/presentationml/2006/main">
+  <p:cSld name="Slide 13">
+    <p:bg>
+      <p:bgPr>
+        <a:solidFill>
+          <a:srgbClr val="000000"/>
+        </a:solidFill>
+      </p:bgPr>
+    </p:bg>
+    <p:spTree>
+      <p:nvGrpSpPr>
+        <p:cNvPr id="1" name=""/>
+        <p:cNvGrpSpPr/>
+        <p:nvPr/>
+      </p:nvGrpSpPr>
+      <p:grpSpPr>
+        <a:xfrm>
+          <a:off x="0" y="0"/>
+          <a:ext cx="0" cy="0"/>
+          <a:chOff x="0" y="0"/>
+          <a:chExt cx="0" cy="0"/>
+        </a:xfrm>
+      </p:grpSpPr>
+      <p:sp>
+        <p:nvSpPr>
+          <p:cNvPr id="2" name="Text 0"/>
+          <p:cNvSpPr txBox="1"/>
+          <p:nvPr/>
+        </p:nvSpPr>
+        <p:spPr>
+          <a:xfrm>
+            <a:off x="548640" y="457200"/>
+            <a:ext cx="11064240" cy="5943600"/>
+          </a:xfrm>
+          <a:prstGeom prst="rect">
+            <a:avLst/>
+          </a:prstGeom>
+          <a:noFill/>
+          <a:ln/>
+        </p:spPr>
+        <p:txBody>
+          <a:bodyPr wrap="square" lIns="0" tIns="0" rIns="0" bIns="0" rtlCol="0" anchor="ctr"/>
+          <a:lstStyle/>
+          <a:p>
+            <a:pPr algn="ctr" indent="0" marL="0">
+              <a:buNone/>
+            </a:pPr>
+            <a:r>
+              <a:rPr lang="en-US" sz="4800" b="1" i="1" dirty="0">
+                <a:solidFill>
+                  <a:srgbClr val="FFFFFF"/>
+                </a:solidFill>
+                <a:latin typeface="Arial" pitchFamily="34" charset="0"/>
+                <a:ea typeface="Arial" pitchFamily="34" charset="-122"/>
+                <a:cs typeface="Arial" pitchFamily="34" charset="-120"/>
+              </a:rPr>
+              <a:t>I rejoice in my Redeemer,</a:t>
+            </a:r>
+            <a:endParaRPr lang="en-US" sz="4800" dirty="0"/>
+          </a:p>
+          <a:p>
+            <a:pPr algn="ctr" indent="0" marL="0">
+              <a:buNone/>
+            </a:pPr>
+            <a:r>
+              <a:rPr lang="en-US" sz="4800" b="1" i="1" dirty="0">
+                <a:solidFill>
+                  <a:srgbClr val="FFFFFF"/>
+                </a:solidFill>
+                <a:latin typeface="Arial" pitchFamily="34" charset="0"/>
+                <a:ea typeface="Arial" pitchFamily="34" charset="-122"/>
+                <a:cs typeface="Arial" pitchFamily="34" charset="-120"/>
+              </a:rPr>
+              <a:t>Greatest Treasure, </a:t>
+            </a:r>
+            <a:endParaRPr lang="en-US" sz="4800" dirty="0"/>
+          </a:p>
+          <a:p>
+            <a:pPr algn="ctr" indent="0" marL="0">
+              <a:buNone/>
+            </a:pPr>
+            <a:r>
+              <a:rPr lang="en-US" sz="4800" b="1" i="1" dirty="0">
+                <a:solidFill>
+                  <a:srgbClr val="FFFFFF"/>
+                </a:solidFill>
+                <a:latin typeface="Arial" pitchFamily="34" charset="0"/>
+                <a:ea typeface="Arial" pitchFamily="34" charset="-122"/>
+                <a:cs typeface="Arial" pitchFamily="34" charset="-120"/>
+              </a:rPr>
+              <a:t>Wellspring of my soul.</a:t>
+            </a:r>
+            <a:endParaRPr lang="en-US" sz="4800" dirty="0"/>
+          </a:p>
+        </p:txBody>
+      </p:sp>
+    </p:spTree>
+  </p:cSld>
+  <p:clrMapOvr>
+    <a:masterClrMapping/>
+  </p:clrMapOvr>
+</p:sld>
+</file>
+
+<file path=ppt/slides/slide14.xml><?xml version="1.0" encoding="utf-8"?>
+<p:sld xmlns:a="http://schemas.openxmlformats.org/drawingml/2006/main" xmlns:r="http://schemas.openxmlformats.org/officeDocument/2006/relationships" xmlns:p="http://schemas.openxmlformats.org/presentationml/2006/main">
+  <p:cSld name="Slide 14">
+    <p:bg>
+      <p:bgPr>
+        <a:solidFill>
+          <a:srgbClr val="000000"/>
+        </a:solidFill>
+      </p:bgPr>
+    </p:bg>
+    <p:spTree>
+      <p:nvGrpSpPr>
+        <p:cNvPr id="1" name=""/>
+        <p:cNvGrpSpPr/>
+        <p:nvPr/>
+      </p:nvGrpSpPr>
+      <p:grpSpPr>
+        <a:xfrm>
+          <a:off x="0" y="0"/>
+          <a:ext cx="0" cy="0"/>
+          <a:chOff x="0" y="0"/>
+          <a:chExt cx="0" cy="0"/>
+        </a:xfrm>
+      </p:grpSpPr>
+      <p:sp>
+        <p:nvSpPr>
+          <p:cNvPr id="2" name="Text 0"/>
+          <p:cNvSpPr txBox="1"/>
+          <p:nvPr/>
+        </p:nvSpPr>
+        <p:spPr>
+          <a:xfrm>
+            <a:off x="548640" y="457200"/>
+            <a:ext cx="11064240" cy="5943600"/>
+          </a:xfrm>
+          <a:prstGeom prst="rect">
+            <a:avLst/>
+          </a:prstGeom>
+          <a:noFill/>
+          <a:ln/>
+        </p:spPr>
+        <p:txBody>
+          <a:bodyPr wrap="square" lIns="0" tIns="0" rIns="0" bIns="0" rtlCol="0" anchor="ctr"/>
+          <a:lstStyle/>
+          <a:p>
+            <a:pPr algn="ctr" indent="0" marL="0">
+              <a:buNone/>
+            </a:pPr>
+            <a:r>
+              <a:rPr lang="en-US" sz="4800" b="1" i="1" dirty="0">
+                <a:solidFill>
+                  <a:srgbClr val="FFFFFF"/>
+                </a:solidFill>
+                <a:latin typeface="Arial" pitchFamily="34" charset="0"/>
+                <a:ea typeface="Arial" pitchFamily="34" charset="-122"/>
+                <a:cs typeface="Arial" pitchFamily="34" charset="-120"/>
+              </a:rPr>
+              <a:t>I will trust in Him, no other,</a:t>
+            </a:r>
+            <a:endParaRPr lang="en-US" sz="4800" dirty="0"/>
+          </a:p>
+          <a:p>
+            <a:pPr algn="ctr" indent="0" marL="0">
+              <a:buNone/>
+            </a:pPr>
+            <a:r>
+              <a:rPr lang="en-US" sz="4800" b="1" i="1" dirty="0">
+                <a:solidFill>
+                  <a:srgbClr val="FFFFFF"/>
+                </a:solidFill>
+                <a:latin typeface="Arial" pitchFamily="34" charset="0"/>
+                <a:ea typeface="Arial" pitchFamily="34" charset="-122"/>
+                <a:cs typeface="Arial" pitchFamily="34" charset="-120"/>
+              </a:rPr>
               <a:t>My soul is satisfied in Him alone.</a:t>
             </a:r>
             <a:endParaRPr lang="en-US" sz="4800" dirty="0"/>
@@ -1850,6 +2575,12 @@
               </a:rPr>
               <a:t>My soul is satisfied in Him alone.</a:t>
             </a:r>
+            <a:endParaRPr lang="en-US" sz="4800" dirty="0"/>
+          </a:p>
+          <a:p>
+            <a:pPr algn="ctr" indent="0" marL="0">
+              <a:buNone/>
+            </a:pPr>
             <a:endParaRPr lang="en-US" sz="4800" dirty="0"/>
           </a:p>
           <a:p>
@@ -1970,7 +2701,24 @@
                 <a:ea typeface="Arial" pitchFamily="34" charset="-122"/>
                 <a:cs typeface="Arial" pitchFamily="34" charset="-120"/>
               </a:rPr>
-              <a:t>But in the costly wounds of love, at the cross.</a:t>
+              <a:t>But in the costly wounds of love,</a:t>
+            </a:r>
+            <a:endParaRPr lang="en-US" sz="4800" dirty="0"/>
+          </a:p>
+          <a:p>
+            <a:pPr algn="ctr" indent="0" marL="0">
+              <a:buNone/>
+            </a:pPr>
+            <a:r>
+              <a:rPr lang="en-US" sz="4800" b="1" dirty="0">
+                <a:solidFill>
+                  <a:srgbClr val="FFFFFF"/>
+                </a:solidFill>
+                <a:latin typeface="Arial" pitchFamily="34" charset="0"/>
+                <a:ea typeface="Arial" pitchFamily="34" charset="-122"/>
+                <a:cs typeface="Arial" pitchFamily="34" charset="-120"/>
+              </a:rPr>
+              <a:t>... at the cross.</a:t>
             </a:r>
             <a:endParaRPr lang="en-US" sz="4800" dirty="0"/>
           </a:p>
@@ -2075,7 +2823,24 @@
                 <a:ea typeface="Arial" pitchFamily="34" charset="-122"/>
                 <a:cs typeface="Arial" pitchFamily="34" charset="-120"/>
               </a:rPr>
-              <a:t>But in the blood of Christ that flowed at the cross.</a:t>
+              <a:t>But in the blood of Christ that flowed</a:t>
+            </a:r>
+            <a:endParaRPr lang="en-US" sz="4800" dirty="0"/>
+          </a:p>
+          <a:p>
+            <a:pPr algn="ctr" indent="0" marL="0">
+              <a:buNone/>
+            </a:pPr>
+            <a:r>
+              <a:rPr lang="en-US" sz="4800" b="1" dirty="0">
+                <a:solidFill>
+                  <a:srgbClr val="FFFFFF"/>
+                </a:solidFill>
+                <a:latin typeface="Arial" pitchFamily="34" charset="0"/>
+                <a:ea typeface="Arial" pitchFamily="34" charset="-122"/>
+                <a:cs typeface="Arial" pitchFamily="34" charset="-120"/>
+              </a:rPr>
+              <a:t>... at the cross.</a:t>
             </a:r>
             <a:endParaRPr lang="en-US" sz="4800" dirty="0"/>
           </a:p>
@@ -2163,7 +2928,7 @@
                 <a:ea typeface="Arial" pitchFamily="34" charset="-122"/>
                 <a:cs typeface="Arial" pitchFamily="34" charset="-120"/>
               </a:rPr>
-              <a:t>Greatest Treasure, Wellspring of my soul.</a:t>
+              <a:t>Greatest Treasure, </a:t>
             </a:r>
             <a:endParaRPr lang="en-US" sz="4800" dirty="0"/>
           </a:p>
@@ -2180,24 +2945,7 @@
                 <a:ea typeface="Arial" pitchFamily="34" charset="-122"/>
                 <a:cs typeface="Arial" pitchFamily="34" charset="-120"/>
               </a:rPr>
-              <a:t>I will trust in Him, no other,</a:t>
-            </a:r>
-            <a:endParaRPr lang="en-US" sz="4800" dirty="0"/>
-          </a:p>
-          <a:p>
-            <a:pPr algn="ctr" indent="0" marL="0">
-              <a:buNone/>
-            </a:pPr>
-            <a:r>
-              <a:rPr lang="en-US" sz="4800" b="1" i="1" dirty="0">
-                <a:solidFill>
-                  <a:srgbClr val="FFFFFF"/>
-                </a:solidFill>
-                <a:latin typeface="Arial" pitchFamily="34" charset="0"/>
-                <a:ea typeface="Arial" pitchFamily="34" charset="-122"/>
-                <a:cs typeface="Arial" pitchFamily="34" charset="-120"/>
-              </a:rPr>
-              <a:t>my soul is satisfied in Him alone.</a:t>
+              <a:t>Wellspring of my soul.</a:t>
             </a:r>
             <a:endParaRPr lang="en-US" sz="4800" dirty="0"/>
           </a:p>
@@ -2260,49 +3008,32 @@
               <a:buNone/>
             </a:pPr>
             <a:r>
-              <a:rPr lang="en-US" sz="4800" b="1" dirty="0">
-                <a:solidFill>
-                  <a:srgbClr val="FFFFFF"/>
-                </a:solidFill>
-                <a:latin typeface="Arial" pitchFamily="34" charset="0"/>
-                <a:ea typeface="Arial" pitchFamily="34" charset="-122"/>
-                <a:cs typeface="Arial" pitchFamily="34" charset="-120"/>
-              </a:rPr>
-              <a:t>As summer flowers we fade and die.</a:t>
-            </a:r>
-            <a:endParaRPr lang="en-US" sz="4800" dirty="0"/>
-          </a:p>
-          <a:p>
-            <a:pPr algn="ctr" indent="0" marL="0">
-              <a:buNone/>
-            </a:pPr>
-            <a:r>
-              <a:rPr lang="en-US" sz="4800" b="1" dirty="0">
-                <a:solidFill>
-                  <a:srgbClr val="FFFFFF"/>
-                </a:solidFill>
-                <a:latin typeface="Arial" pitchFamily="34" charset="0"/>
-                <a:ea typeface="Arial" pitchFamily="34" charset="-122"/>
-                <a:cs typeface="Arial" pitchFamily="34" charset="-120"/>
-              </a:rPr>
-              <a:t>Fame, youth and beauty hurry by.</a:t>
-            </a:r>
-            <a:endParaRPr lang="en-US" sz="4800" dirty="0"/>
-          </a:p>
-          <a:p>
-            <a:pPr algn="ctr" indent="0" marL="0">
-              <a:buNone/>
-            </a:pPr>
-            <a:r>
-              <a:rPr lang="en-US" sz="4800" b="1" dirty="0">
-                <a:solidFill>
-                  <a:srgbClr val="FFFFFF"/>
-                </a:solidFill>
-                <a:latin typeface="Arial" pitchFamily="34" charset="0"/>
-                <a:ea typeface="Arial" pitchFamily="34" charset="-122"/>
-                <a:cs typeface="Arial" pitchFamily="34" charset="-120"/>
-              </a:rPr>
-              <a:t>But life eternal calls to us, at the cross.</a:t>
+              <a:rPr lang="en-US" sz="4800" b="1" i="1" dirty="0">
+                <a:solidFill>
+                  <a:srgbClr val="FFFFFF"/>
+                </a:solidFill>
+                <a:latin typeface="Arial" pitchFamily="34" charset="0"/>
+                <a:ea typeface="Arial" pitchFamily="34" charset="-122"/>
+                <a:cs typeface="Arial" pitchFamily="34" charset="-120"/>
+              </a:rPr>
+              <a:t>I will trust in Him, no other,</a:t>
+            </a:r>
+            <a:endParaRPr lang="en-US" sz="4800" dirty="0"/>
+          </a:p>
+          <a:p>
+            <a:pPr algn="ctr" indent="0" marL="0">
+              <a:buNone/>
+            </a:pPr>
+            <a:r>
+              <a:rPr lang="en-US" sz="4800" b="1" i="1" dirty="0">
+                <a:solidFill>
+                  <a:srgbClr val="FFFFFF"/>
+                </a:solidFill>
+                <a:latin typeface="Arial" pitchFamily="34" charset="0"/>
+                <a:ea typeface="Arial" pitchFamily="34" charset="-122"/>
+                <a:cs typeface="Arial" pitchFamily="34" charset="-120"/>
+              </a:rPr>
+              <a:t>my soul is satisfied in Him alone.</a:t>
             </a:r>
             <a:endParaRPr lang="en-US" sz="4800" dirty="0"/>
           </a:p>
@@ -2373,7 +3104,7 @@
                 <a:ea typeface="Arial" pitchFamily="34" charset="-122"/>
                 <a:cs typeface="Arial" pitchFamily="34" charset="-120"/>
               </a:rPr>
-              <a:t>I will not boast in wealth or might,</a:t>
+              <a:t>As summer flowers we fade and die.</a:t>
             </a:r>
             <a:endParaRPr lang="en-US" sz="4800" dirty="0"/>
           </a:p>
@@ -2390,7 +3121,7 @@
                 <a:ea typeface="Arial" pitchFamily="34" charset="-122"/>
                 <a:cs typeface="Arial" pitchFamily="34" charset="-120"/>
               </a:rPr>
-              <a:t>or human wisdom’s fleeting light.</a:t>
+              <a:t>Fame, youth and beauty hurry by.</a:t>
             </a:r>
             <a:endParaRPr lang="en-US" sz="4800" dirty="0"/>
           </a:p>
@@ -2407,7 +3138,7 @@
                 <a:ea typeface="Arial" pitchFamily="34" charset="-122"/>
                 <a:cs typeface="Arial" pitchFamily="34" charset="-120"/>
               </a:rPr>
-              <a:t>But I will boast in knowing Christ, at the cross.</a:t>
+              <a:t>But life eternal calls to us, at the cross.</a:t>
             </a:r>
             <a:endParaRPr lang="en-US" sz="4800" dirty="0"/>
           </a:p>
@@ -2470,66 +3201,49 @@
               <a:buNone/>
             </a:pPr>
             <a:r>
-              <a:rPr lang="en-US" sz="4800" b="1" i="1" dirty="0">
-                <a:solidFill>
-                  <a:srgbClr val="FFFFFF"/>
-                </a:solidFill>
-                <a:latin typeface="Arial" pitchFamily="34" charset="0"/>
-                <a:ea typeface="Arial" pitchFamily="34" charset="-122"/>
-                <a:cs typeface="Arial" pitchFamily="34" charset="-120"/>
-              </a:rPr>
-              <a:t>I rejoice in my Redeemer,</a:t>
-            </a:r>
-            <a:endParaRPr lang="en-US" sz="4800" dirty="0"/>
-          </a:p>
-          <a:p>
-            <a:pPr algn="ctr" indent="0" marL="0">
-              <a:buNone/>
-            </a:pPr>
-            <a:r>
-              <a:rPr lang="en-US" sz="4800" b="1" i="1" dirty="0">
-                <a:solidFill>
-                  <a:srgbClr val="FFFFFF"/>
-                </a:solidFill>
-                <a:latin typeface="Arial" pitchFamily="34" charset="0"/>
-                <a:ea typeface="Arial" pitchFamily="34" charset="-122"/>
-                <a:cs typeface="Arial" pitchFamily="34" charset="-120"/>
-              </a:rPr>
-              <a:t>Greatest Treasure, Wellspring of my soul.</a:t>
-            </a:r>
-            <a:endParaRPr lang="en-US" sz="4800" dirty="0"/>
-          </a:p>
-          <a:p>
-            <a:pPr algn="ctr" indent="0" marL="0">
-              <a:buNone/>
-            </a:pPr>
-            <a:r>
-              <a:rPr lang="en-US" sz="4800" b="1" i="1" dirty="0">
-                <a:solidFill>
-                  <a:srgbClr val="FFFFFF"/>
-                </a:solidFill>
-                <a:latin typeface="Arial" pitchFamily="34" charset="0"/>
-                <a:ea typeface="Arial" pitchFamily="34" charset="-122"/>
-                <a:cs typeface="Arial" pitchFamily="34" charset="-120"/>
-              </a:rPr>
-              <a:t>I will trust in Him, no other,</a:t>
-            </a:r>
-            <a:endParaRPr lang="en-US" sz="4800" dirty="0"/>
-          </a:p>
-          <a:p>
-            <a:pPr algn="ctr" indent="0" marL="0">
-              <a:buNone/>
-            </a:pPr>
-            <a:r>
-              <a:rPr lang="en-US" sz="4800" b="1" i="1" dirty="0">
-                <a:solidFill>
-                  <a:srgbClr val="FFFFFF"/>
-                </a:solidFill>
-                <a:latin typeface="Arial" pitchFamily="34" charset="0"/>
-                <a:ea typeface="Arial" pitchFamily="34" charset="-122"/>
-                <a:cs typeface="Arial" pitchFamily="34" charset="-120"/>
-              </a:rPr>
-              <a:t>my soul is satisfied in Him alone.</a:t>
+              <a:rPr lang="en-US" sz="4800" b="1" dirty="0">
+                <a:solidFill>
+                  <a:srgbClr val="FFFFFF"/>
+                </a:solidFill>
+                <a:latin typeface="Arial" pitchFamily="34" charset="0"/>
+                <a:ea typeface="Arial" pitchFamily="34" charset="-122"/>
+                <a:cs typeface="Arial" pitchFamily="34" charset="-120"/>
+              </a:rPr>
+              <a:t>I will not boast in wealth or might,</a:t>
+            </a:r>
+            <a:endParaRPr lang="en-US" sz="4800" dirty="0"/>
+          </a:p>
+          <a:p>
+            <a:pPr algn="ctr" indent="0" marL="0">
+              <a:buNone/>
+            </a:pPr>
+            <a:r>
+              <a:rPr lang="en-US" sz="4800" b="1" dirty="0">
+                <a:solidFill>
+                  <a:srgbClr val="FFFFFF"/>
+                </a:solidFill>
+                <a:latin typeface="Arial" pitchFamily="34" charset="0"/>
+                <a:ea typeface="Arial" pitchFamily="34" charset="-122"/>
+                <a:cs typeface="Arial" pitchFamily="34" charset="-120"/>
+              </a:rPr>
+              <a:t>or human wisdom’s fleeting light.</a:t>
+            </a:r>
+            <a:endParaRPr lang="en-US" sz="4800" dirty="0"/>
+          </a:p>
+          <a:p>
+            <a:pPr algn="ctr" indent="0" marL="0">
+              <a:buNone/>
+            </a:pPr>
+            <a:r>
+              <a:rPr lang="en-US" sz="4800" b="1" dirty="0">
+                <a:solidFill>
+                  <a:srgbClr val="FFFFFF"/>
+                </a:solidFill>
+                <a:latin typeface="Arial" pitchFamily="34" charset="0"/>
+                <a:ea typeface="Arial" pitchFamily="34" charset="-122"/>
+                <a:cs typeface="Arial" pitchFamily="34" charset="-120"/>
+              </a:rPr>
+              <a:t>But I will boast in knowing Christ, at the cross.</a:t>
             </a:r>
             <a:endParaRPr lang="en-US" sz="4800" dirty="0"/>
           </a:p>
@@ -2592,49 +3306,49 @@
               <a:buNone/>
             </a:pPr>
             <a:r>
-              <a:rPr lang="en-US" sz="4800" b="1" dirty="0">
-                <a:solidFill>
-                  <a:srgbClr val="FFFFFF"/>
-                </a:solidFill>
-                <a:latin typeface="Arial" pitchFamily="34" charset="0"/>
-                <a:ea typeface="Arial" pitchFamily="34" charset="-122"/>
-                <a:cs typeface="Arial" pitchFamily="34" charset="-120"/>
-              </a:rPr>
-              <a:t>Two wonders here that I confess:</a:t>
-            </a:r>
-            <a:endParaRPr lang="en-US" sz="4800" dirty="0"/>
-          </a:p>
-          <a:p>
-            <a:pPr algn="ctr" indent="0" marL="0">
-              <a:buNone/>
-            </a:pPr>
-            <a:r>
-              <a:rPr lang="en-US" sz="4800" b="1" dirty="0">
-                <a:solidFill>
-                  <a:srgbClr val="FFFFFF"/>
-                </a:solidFill>
-                <a:latin typeface="Arial" pitchFamily="34" charset="0"/>
-                <a:ea typeface="Arial" pitchFamily="34" charset="-122"/>
-                <a:cs typeface="Arial" pitchFamily="34" charset="-120"/>
-              </a:rPr>
-              <a:t>my worth and my unworthiness.</a:t>
-            </a:r>
-            <a:endParaRPr lang="en-US" sz="4800" dirty="0"/>
-          </a:p>
-          <a:p>
-            <a:pPr algn="ctr" indent="0" marL="0">
-              <a:buNone/>
-            </a:pPr>
-            <a:r>
-              <a:rPr lang="en-US" sz="4800" b="1" dirty="0">
-                <a:solidFill>
-                  <a:srgbClr val="FFFFFF"/>
-                </a:solidFill>
-                <a:latin typeface="Arial" pitchFamily="34" charset="0"/>
-                <a:ea typeface="Arial" pitchFamily="34" charset="-122"/>
-                <a:cs typeface="Arial" pitchFamily="34" charset="-120"/>
-              </a:rPr>
-              <a:t>My value fixed – my ransom paid at the cross.</a:t>
+              <a:rPr lang="en-US" sz="4800" b="1" i="1" dirty="0">
+                <a:solidFill>
+                  <a:srgbClr val="FFFFFF"/>
+                </a:solidFill>
+                <a:latin typeface="Arial" pitchFamily="34" charset="0"/>
+                <a:ea typeface="Arial" pitchFamily="34" charset="-122"/>
+                <a:cs typeface="Arial" pitchFamily="34" charset="-120"/>
+              </a:rPr>
+              <a:t>I rejoice in my Redeemer,</a:t>
+            </a:r>
+            <a:endParaRPr lang="en-US" sz="4800" dirty="0"/>
+          </a:p>
+          <a:p>
+            <a:pPr algn="ctr" indent="0" marL="0">
+              <a:buNone/>
+            </a:pPr>
+            <a:r>
+              <a:rPr lang="en-US" sz="4800" b="1" i="1" dirty="0">
+                <a:solidFill>
+                  <a:srgbClr val="FFFFFF"/>
+                </a:solidFill>
+                <a:latin typeface="Arial" pitchFamily="34" charset="0"/>
+                <a:ea typeface="Arial" pitchFamily="34" charset="-122"/>
+                <a:cs typeface="Arial" pitchFamily="34" charset="-120"/>
+              </a:rPr>
+              <a:t>Greatest Treasure, </a:t>
+            </a:r>
+            <a:endParaRPr lang="en-US" sz="4800" dirty="0"/>
+          </a:p>
+          <a:p>
+            <a:pPr algn="ctr" indent="0" marL="0">
+              <a:buNone/>
+            </a:pPr>
+            <a:r>
+              <a:rPr lang="en-US" sz="4800" b="1" i="1" dirty="0">
+                <a:solidFill>
+                  <a:srgbClr val="FFFFFF"/>
+                </a:solidFill>
+                <a:latin typeface="Arial" pitchFamily="34" charset="0"/>
+                <a:ea typeface="Arial" pitchFamily="34" charset="-122"/>
+                <a:cs typeface="Arial" pitchFamily="34" charset="-120"/>
+              </a:rPr>
+              <a:t>Wellspring of my soul.</a:t>
             </a:r>
             <a:endParaRPr lang="en-US" sz="4800" dirty="0"/>
           </a:p>
@@ -2692,40 +3406,6 @@
         <p:txBody>
           <a:bodyPr wrap="square" lIns="0" tIns="0" rIns="0" bIns="0" rtlCol="0" anchor="ctr"/>
           <a:lstStyle/>
-          <a:p>
-            <a:pPr algn="ctr" indent="0" marL="0">
-              <a:buNone/>
-            </a:pPr>
-            <a:r>
-              <a:rPr lang="en-US" sz="4800" b="1" i="1" dirty="0">
-                <a:solidFill>
-                  <a:srgbClr val="FFFFFF"/>
-                </a:solidFill>
-                <a:latin typeface="Arial" pitchFamily="34" charset="0"/>
-                <a:ea typeface="Arial" pitchFamily="34" charset="-122"/>
-                <a:cs typeface="Arial" pitchFamily="34" charset="-120"/>
-              </a:rPr>
-              <a:t>I rejoice in my Redeemer,</a:t>
-            </a:r>
-            <a:endParaRPr lang="en-US" sz="4800" dirty="0"/>
-          </a:p>
-          <a:p>
-            <a:pPr algn="ctr" indent="0" marL="0">
-              <a:buNone/>
-            </a:pPr>
-            <a:r>
-              <a:rPr lang="en-US" sz="4800" b="1" i="1" dirty="0">
-                <a:solidFill>
-                  <a:srgbClr val="FFFFFF"/>
-                </a:solidFill>
-                <a:latin typeface="Arial" pitchFamily="34" charset="0"/>
-                <a:ea typeface="Arial" pitchFamily="34" charset="-122"/>
-                <a:cs typeface="Arial" pitchFamily="34" charset="-120"/>
-              </a:rPr>
-              <a:t>Greatest Treasure, Wellspring of my soul.</a:t>
-            </a:r>
-            <a:endParaRPr lang="en-US" sz="4800" dirty="0"/>
-          </a:p>
           <a:p>
             <a:pPr algn="ctr" indent="0" marL="0">
               <a:buNone/>

--- a/fubc-en/5-My Worth Is Not In What I Own.pptx
+++ b/fubc-en/5-My Worth Is Not In What I Own.pptx
@@ -19,9 +19,10 @@
     <p:sldId id="267" r:id="rId13"/>
     <p:sldId id="268" r:id="rId14"/>
     <p:sldId id="269" r:id="rId15"/>
+    <p:sldId id="270" r:id="rId16"/>
   </p:sldIdLst>
   <p:notesMasterIdLst>
-    <p:notesMasterId r:id="rId16"/>
+    <p:notesMasterId r:id="rId17"/>
   </p:notesMasterIdLst>
   <p:sldSz cx="12192000" cy="6858000"/>
   <p:notesSz cx="6858000" cy="12192000"/>
@@ -979,6 +980,94 @@
             <a:fld id="{F7021451-1387-4CA6-816F-3879F97B5CBC}" type="slidenum">
               <a:rPr lang="en-US"/>
               <a:t>14</a:t>
+            </a:fld>
+            <a:endParaRPr lang="en-US"/>
+          </a:p>
+        </p:txBody>
+      </p:sp>
+    </p:spTree>
+    <p:extLst>
+      <p:ext uri="{BB962C8B-B14F-4D97-AF65-F5344CB8AC3E}">
+        <p14:creationId xmlns:p14="http://schemas.microsoft.com/office/powerpoint/2010/main" val="1024086991"/>
+      </p:ext>
+    </p:extLst>
+  </p:cSld>
+  <p:clrMapOvr>
+    <a:masterClrMapping/>
+  </p:clrMapOvr>
+</p:notes>
+</file>
+
+<file path=ppt/notesSlides/notesSlide15.xml><?xml version="1.0" encoding="utf-8"?>
+<p:notes xmlns:a="http://schemas.openxmlformats.org/drawingml/2006/main" xmlns:r="http://schemas.openxmlformats.org/officeDocument/2006/relationships" xmlns:p="http://schemas.openxmlformats.org/presentationml/2006/main">
+  <p:cSld>
+    <p:spTree>
+      <p:nvGrpSpPr>
+        <p:cNvPr id="1" name=""/>
+        <p:cNvGrpSpPr/>
+        <p:nvPr/>
+      </p:nvGrpSpPr>
+      <p:grpSpPr>
+        <a:xfrm>
+          <a:off x="0" y="0"/>
+          <a:ext cx="0" cy="0"/>
+          <a:chOff x="0" y="0"/>
+          <a:chExt cx="0" cy="0"/>
+        </a:xfrm>
+      </p:grpSpPr>
+      <p:sp>
+        <p:nvSpPr>
+          <p:cNvPr id="2" name="Slide Image Placeholder 1"/>
+          <p:cNvSpPr>
+            <a:spLocks noGrp="1" noRot="1" noChangeAspect="1"/>
+          </p:cNvSpPr>
+          <p:nvPr>
+            <p:ph type="sldImg"/>
+          </p:nvPr>
+        </p:nvSpPr>
+        <p:spPr/>
+      </p:sp>
+      <p:sp>
+        <p:nvSpPr>
+          <p:cNvPr id="3" name="Notes Placeholder 2"/>
+          <p:cNvSpPr>
+            <a:spLocks noGrp="1"/>
+          </p:cNvSpPr>
+          <p:nvPr>
+            <p:ph type="body" idx="1"/>
+          </p:nvPr>
+        </p:nvSpPr>
+        <p:spPr/>
+        <p:txBody>
+          <a:bodyPr/>
+          <a:lstStyle/>
+          <a:p>
+            <a:r>
+              <a:rPr lang="en-US" dirty="0"/>
+              <a:t/>
+            </a:r>
+            <a:endParaRPr lang="en-US" dirty="0"/>
+          </a:p>
+        </p:txBody>
+      </p:sp>
+      <p:sp>
+        <p:nvSpPr>
+          <p:cNvPr id="4" name="Slide Number Placeholder 3"/>
+          <p:cNvSpPr>
+            <a:spLocks noGrp="1"/>
+          </p:cNvSpPr>
+          <p:nvPr>
+            <p:ph type="sldNum" sz="quarter" idx="10"/>
+          </p:nvPr>
+        </p:nvSpPr>
+        <p:spPr/>
+        <p:txBody>
+          <a:bodyPr/>
+          <a:lstStyle/>
+          <a:p>
+            <a:fld id="{F7021451-1387-4CA6-816F-3879F97B5CBC}" type="slidenum">
+              <a:rPr lang="en-US"/>
+              <a:t>15</a:t>
             </a:fld>
             <a:endParaRPr lang="en-US"/>
           </a:p>
@@ -2258,7 +2347,7 @@
                 <a:ea typeface="Arial" pitchFamily="34" charset="-122"/>
                 <a:cs typeface="Arial" pitchFamily="34" charset="-120"/>
               </a:rPr>
-              <a:t>Greatest Treasure, </a:t>
+              <a:t>Greatest Treasure,</a:t>
             </a:r>
             <a:endParaRPr lang="en-US" sz="4800" dirty="0"/>
           </a:p>
@@ -2451,7 +2540,7 @@
                 <a:ea typeface="Arial" pitchFamily="34" charset="-122"/>
                 <a:cs typeface="Arial" pitchFamily="34" charset="-120"/>
               </a:rPr>
-              <a:t>Greatest Treasure, </a:t>
+              <a:t>Greatest Treasure,</a:t>
             </a:r>
             <a:endParaRPr lang="en-US" sz="4800" dirty="0"/>
           </a:p>
@@ -2610,6 +2699,38 @@
 </p:sld>
 </file>
 
+<file path=ppt/slides/slide15.xml><?xml version="1.0" encoding="utf-8"?>
+<p:sld xmlns:a="http://schemas.openxmlformats.org/drawingml/2006/main" xmlns:r="http://schemas.openxmlformats.org/officeDocument/2006/relationships" xmlns:p="http://schemas.openxmlformats.org/presentationml/2006/main">
+  <p:cSld name="Slide 15">
+    <p:bg>
+      <p:bgPr>
+        <a:solidFill>
+          <a:srgbClr val="000000"/>
+        </a:solidFill>
+      </p:bgPr>
+    </p:bg>
+    <p:spTree>
+      <p:nvGrpSpPr>
+        <p:cNvPr id="1" name=""/>
+        <p:cNvGrpSpPr/>
+        <p:nvPr/>
+      </p:nvGrpSpPr>
+      <p:grpSpPr>
+        <a:xfrm>
+          <a:off x="0" y="0"/>
+          <a:ext cx="0" cy="0"/>
+          <a:chOff x="0" y="0"/>
+          <a:chExt cx="0" cy="0"/>
+        </a:xfrm>
+      </p:grpSpPr>
+    </p:spTree>
+  </p:cSld>
+  <p:clrMapOvr>
+    <a:masterClrMapping/>
+  </p:clrMapOvr>
+</p:sld>
+</file>
+
 <file path=ppt/slides/slide2.xml><?xml version="1.0" encoding="utf-8"?>
 <p:sld xmlns:a="http://schemas.openxmlformats.org/drawingml/2006/main" xmlns:r="http://schemas.openxmlformats.org/officeDocument/2006/relationships" xmlns:p="http://schemas.openxmlformats.org/presentationml/2006/main">
   <p:cSld name="Slide 2">
@@ -2718,7 +2839,7 @@
                 <a:ea typeface="Arial" pitchFamily="34" charset="-122"/>
                 <a:cs typeface="Arial" pitchFamily="34" charset="-120"/>
               </a:rPr>
-              <a:t>... at the cross.</a:t>
+              <a:t>at the cross.</a:t>
             </a:r>
             <a:endParaRPr lang="en-US" sz="4800" dirty="0"/>
           </a:p>
@@ -2840,7 +2961,7 @@
                 <a:ea typeface="Arial" pitchFamily="34" charset="-122"/>
                 <a:cs typeface="Arial" pitchFamily="34" charset="-120"/>
               </a:rPr>
-              <a:t>... at the cross.</a:t>
+              <a:t>at the cross.</a:t>
             </a:r>
             <a:endParaRPr lang="en-US" sz="4800" dirty="0"/>
           </a:p>
@@ -2928,7 +3049,7 @@
                 <a:ea typeface="Arial" pitchFamily="34" charset="-122"/>
                 <a:cs typeface="Arial" pitchFamily="34" charset="-120"/>
               </a:rPr>
-              <a:t>Greatest Treasure, </a:t>
+              <a:t>Greatest Treasure,</a:t>
             </a:r>
             <a:endParaRPr lang="en-US" sz="4800" dirty="0"/>
           </a:p>
@@ -3138,7 +3259,7 @@
                 <a:ea typeface="Arial" pitchFamily="34" charset="-122"/>
                 <a:cs typeface="Arial" pitchFamily="34" charset="-120"/>
               </a:rPr>
-              <a:t>But life eternal calls to us, at the cross.</a:t>
+              <a:t>But life eternal calls to us at the cross.</a:t>
             </a:r>
             <a:endParaRPr lang="en-US" sz="4800" dirty="0"/>
           </a:p>
@@ -3243,7 +3364,7 @@
                 <a:ea typeface="Arial" pitchFamily="34" charset="-122"/>
                 <a:cs typeface="Arial" pitchFamily="34" charset="-120"/>
               </a:rPr>
-              <a:t>But I will boast in knowing Christ, at the cross.</a:t>
+              <a:t>But I will boast in knowing Christ at the cross.</a:t>
             </a:r>
             <a:endParaRPr lang="en-US" sz="4800" dirty="0"/>
           </a:p>
@@ -3331,7 +3452,7 @@
                 <a:ea typeface="Arial" pitchFamily="34" charset="-122"/>
                 <a:cs typeface="Arial" pitchFamily="34" charset="-120"/>
               </a:rPr>
-              <a:t>Greatest Treasure, </a:t>
+              <a:t>Greatest Treasure,</a:t>
             </a:r>
             <a:endParaRPr lang="en-US" sz="4800" dirty="0"/>
           </a:p>

--- a/fubc-en/5-My Worth Is Not In What I Own.pptx
+++ b/fubc-en/5-My Worth Is Not In What I Own.pptx
@@ -516,7 +516,7 @@
           <a:p>
             <a:r>
               <a:rPr lang="en-US" dirty="0"/>
-              <a:t/>
+              <a:t>T · 1/1</a:t>
             </a:r>
             <a:endParaRPr lang="en-US" dirty="0"/>
           </a:p>
@@ -604,7 +604,7 @@
           <a:p>
             <a:r>
               <a:rPr lang="en-US" dirty="0"/>
-              <a:t/>
+              <a:t>B · 1/1</a:t>
             </a:r>
             <a:endParaRPr lang="en-US" dirty="0"/>
           </a:p>
@@ -692,7 +692,7 @@
           <a:p>
             <a:r>
               <a:rPr lang="en-US" dirty="0"/>
-              <a:t/>
+              <a:t>P · 1/2</a:t>
             </a:r>
             <a:endParaRPr lang="en-US" dirty="0"/>
           </a:p>
@@ -780,7 +780,7 @@
           <a:p>
             <a:r>
               <a:rPr lang="en-US" dirty="0"/>
-              <a:t/>
+              <a:t>P · 2/2</a:t>
             </a:r>
             <a:endParaRPr lang="en-US" dirty="0"/>
           </a:p>
@@ -868,7 +868,7 @@
           <a:p>
             <a:r>
               <a:rPr lang="en-US" dirty="0"/>
-              <a:t/>
+              <a:t>P · 1/2</a:t>
             </a:r>
             <a:endParaRPr lang="en-US" dirty="0"/>
           </a:p>
@@ -956,7 +956,7 @@
           <a:p>
             <a:r>
               <a:rPr lang="en-US" dirty="0"/>
-              <a:t/>
+              <a:t>P · 2/2</a:t>
             </a:r>
             <a:endParaRPr lang="en-US" dirty="0"/>
           </a:p>
@@ -1132,7 +1132,7 @@
           <a:p>
             <a:r>
               <a:rPr lang="en-US" dirty="0"/>
-              <a:t/>
+              <a:t>1 · 1/2</a:t>
             </a:r>
             <a:endParaRPr lang="en-US" dirty="0"/>
           </a:p>
@@ -1220,7 +1220,7 @@
           <a:p>
             <a:r>
               <a:rPr lang="en-US" dirty="0"/>
-              <a:t/>
+              <a:t>1 · 2/2</a:t>
             </a:r>
             <a:endParaRPr lang="en-US" dirty="0"/>
           </a:p>
@@ -1308,7 +1308,7 @@
           <a:p>
             <a:r>
               <a:rPr lang="en-US" dirty="0"/>
-              <a:t/>
+              <a:t>P · 1/2</a:t>
             </a:r>
             <a:endParaRPr lang="en-US" dirty="0"/>
           </a:p>
@@ -1396,7 +1396,7 @@
           <a:p>
             <a:r>
               <a:rPr lang="en-US" dirty="0"/>
-              <a:t/>
+              <a:t>P · 2/2</a:t>
             </a:r>
             <a:endParaRPr lang="en-US" dirty="0"/>
           </a:p>
@@ -1484,7 +1484,7 @@
           <a:p>
             <a:r>
               <a:rPr lang="en-US" dirty="0"/>
-              <a:t/>
+              <a:t>2 · 1/2</a:t>
             </a:r>
             <a:endParaRPr lang="en-US" dirty="0"/>
           </a:p>
@@ -1572,7 +1572,7 @@
           <a:p>
             <a:r>
               <a:rPr lang="en-US" dirty="0"/>
-              <a:t/>
+              <a:t>2 · 2/2</a:t>
             </a:r>
             <a:endParaRPr lang="en-US" dirty="0"/>
           </a:p>
@@ -1660,7 +1660,7 @@
           <a:p>
             <a:r>
               <a:rPr lang="en-US" dirty="0"/>
-              <a:t/>
+              <a:t>P · 1/2</a:t>
             </a:r>
             <a:endParaRPr lang="en-US" dirty="0"/>
           </a:p>
@@ -1748,7 +1748,7 @@
           <a:p>
             <a:r>
               <a:rPr lang="en-US" dirty="0"/>
-              <a:t/>
+              <a:t>P · 2/2</a:t>
             </a:r>
             <a:endParaRPr lang="en-US" dirty="0"/>
           </a:p>
@@ -2259,7 +2259,24 @@
                 <a:ea typeface="Arial" pitchFamily="34" charset="-122"/>
                 <a:cs typeface="Arial" pitchFamily="34" charset="-120"/>
               </a:rPr>
-              <a:t>My value fixed – my ransom paid at the cross.</a:t>
+              <a:t>My value fixed – my ransom paid </a:t>
+            </a:r>
+            <a:endParaRPr lang="en-US" sz="4800" dirty="0"/>
+          </a:p>
+          <a:p>
+            <a:pPr algn="ctr" indent="0" marL="0">
+              <a:buNone/>
+            </a:pPr>
+            <a:r>
+              <a:rPr lang="en-US" sz="4800" b="1" dirty="0">
+                <a:solidFill>
+                  <a:srgbClr val="FFFFFF"/>
+                </a:solidFill>
+                <a:latin typeface="Arial" pitchFamily="34" charset="0"/>
+                <a:ea typeface="Arial" pitchFamily="34" charset="-122"/>
+                <a:cs typeface="Arial" pitchFamily="34" charset="-120"/>
+              </a:rPr>
+              <a:t>at the cross.</a:t>
             </a:r>
             <a:endParaRPr lang="en-US" sz="4800" dirty="0"/>
           </a:p>
@@ -2370,6 +2387,45 @@
           </a:p>
         </p:txBody>
       </p:sp>
+      <p:sp>
+        <p:nvSpPr>
+          <p:cNvPr id="3" name="Text 1"/>
+          <p:cNvSpPr txBox="1"/>
+          <p:nvPr/>
+        </p:nvSpPr>
+        <p:spPr>
+          <a:xfrm>
+            <a:off x="9235440" y="6126480"/>
+            <a:ext cx="2743200" cy="548640"/>
+          </a:xfrm>
+          <a:prstGeom prst="rect">
+            <a:avLst/>
+          </a:prstGeom>
+          <a:noFill/>
+          <a:ln/>
+        </p:spPr>
+        <p:txBody>
+          <a:bodyPr wrap="square" lIns="0" tIns="0" rIns="0" bIns="0" rtlCol="0" anchor="ctr"/>
+          <a:lstStyle/>
+          <a:p>
+            <a:pPr algn="r" indent="0" marL="0">
+              <a:buNone/>
+            </a:pPr>
+            <a:r>
+              <a:rPr lang="en-US" sz="2400" dirty="0">
+                <a:solidFill>
+                  <a:srgbClr val="8A8A8A"/>
+                </a:solidFill>
+                <a:latin typeface="Arial" pitchFamily="34" charset="0"/>
+                <a:ea typeface="Arial" pitchFamily="34" charset="-122"/>
+                <a:cs typeface="Arial" pitchFamily="34" charset="-120"/>
+              </a:rPr>
+              <a:t>● ○</a:t>
+            </a:r>
+            <a:endParaRPr lang="en-US" sz="2400" dirty="0"/>
+          </a:p>
+        </p:txBody>
+      </p:sp>
     </p:spTree>
   </p:cSld>
   <p:clrMapOvr>
@@ -2458,6 +2514,45 @@
           </a:p>
         </p:txBody>
       </p:sp>
+      <p:sp>
+        <p:nvSpPr>
+          <p:cNvPr id="3" name="Text 1"/>
+          <p:cNvSpPr txBox="1"/>
+          <p:nvPr/>
+        </p:nvSpPr>
+        <p:spPr>
+          <a:xfrm>
+            <a:off x="9235440" y="6126480"/>
+            <a:ext cx="2743200" cy="548640"/>
+          </a:xfrm>
+          <a:prstGeom prst="rect">
+            <a:avLst/>
+          </a:prstGeom>
+          <a:noFill/>
+          <a:ln/>
+        </p:spPr>
+        <p:txBody>
+          <a:bodyPr wrap="square" lIns="0" tIns="0" rIns="0" bIns="0" rtlCol="0" anchor="ctr"/>
+          <a:lstStyle/>
+          <a:p>
+            <a:pPr algn="r" indent="0" marL="0">
+              <a:buNone/>
+            </a:pPr>
+            <a:r>
+              <a:rPr lang="en-US" sz="2400" dirty="0">
+                <a:solidFill>
+                  <a:srgbClr val="8A8A8A"/>
+                </a:solidFill>
+                <a:latin typeface="Arial" pitchFamily="34" charset="0"/>
+                <a:ea typeface="Arial" pitchFamily="34" charset="-122"/>
+                <a:cs typeface="Arial" pitchFamily="34" charset="-120"/>
+              </a:rPr>
+              <a:t>○ ●</a:t>
+            </a:r>
+            <a:endParaRPr lang="en-US" sz="2400" dirty="0"/>
+          </a:p>
+        </p:txBody>
+      </p:sp>
     </p:spTree>
   </p:cSld>
   <p:clrMapOvr>
@@ -2563,6 +2658,45 @@
           </a:p>
         </p:txBody>
       </p:sp>
+      <p:sp>
+        <p:nvSpPr>
+          <p:cNvPr id="3" name="Text 1"/>
+          <p:cNvSpPr txBox="1"/>
+          <p:nvPr/>
+        </p:nvSpPr>
+        <p:spPr>
+          <a:xfrm>
+            <a:off x="9235440" y="6126480"/>
+            <a:ext cx="2743200" cy="548640"/>
+          </a:xfrm>
+          <a:prstGeom prst="rect">
+            <a:avLst/>
+          </a:prstGeom>
+          <a:noFill/>
+          <a:ln/>
+        </p:spPr>
+        <p:txBody>
+          <a:bodyPr wrap="square" lIns="0" tIns="0" rIns="0" bIns="0" rtlCol="0" anchor="ctr"/>
+          <a:lstStyle/>
+          <a:p>
+            <a:pPr algn="r" indent="0" marL="0">
+              <a:buNone/>
+            </a:pPr>
+            <a:r>
+              <a:rPr lang="en-US" sz="2400" dirty="0">
+                <a:solidFill>
+                  <a:srgbClr val="8A8A8A"/>
+                </a:solidFill>
+                <a:latin typeface="Arial" pitchFamily="34" charset="0"/>
+                <a:ea typeface="Arial" pitchFamily="34" charset="-122"/>
+                <a:cs typeface="Arial" pitchFamily="34" charset="-120"/>
+              </a:rPr>
+              <a:t>● ○</a:t>
+            </a:r>
+            <a:endParaRPr lang="en-US" sz="2400" dirty="0"/>
+          </a:p>
+        </p:txBody>
+      </p:sp>
     </p:spTree>
   </p:cSld>
   <p:clrMapOvr>
@@ -2688,6 +2822,45 @@
               <a:t>***</a:t>
             </a:r>
             <a:endParaRPr lang="en-US" sz="4800" dirty="0"/>
+          </a:p>
+        </p:txBody>
+      </p:sp>
+      <p:sp>
+        <p:nvSpPr>
+          <p:cNvPr id="3" name="Text 1"/>
+          <p:cNvSpPr txBox="1"/>
+          <p:nvPr/>
+        </p:nvSpPr>
+        <p:spPr>
+          <a:xfrm>
+            <a:off x="9235440" y="6126480"/>
+            <a:ext cx="2743200" cy="548640"/>
+          </a:xfrm>
+          <a:prstGeom prst="rect">
+            <a:avLst/>
+          </a:prstGeom>
+          <a:noFill/>
+          <a:ln/>
+        </p:spPr>
+        <p:txBody>
+          <a:bodyPr wrap="square" lIns="0" tIns="0" rIns="0" bIns="0" rtlCol="0" anchor="ctr"/>
+          <a:lstStyle/>
+          <a:p>
+            <a:pPr algn="r" indent="0" marL="0">
+              <a:buNone/>
+            </a:pPr>
+            <a:r>
+              <a:rPr lang="en-US" sz="2400" dirty="0">
+                <a:solidFill>
+                  <a:srgbClr val="8A8A8A"/>
+                </a:solidFill>
+                <a:latin typeface="Arial" pitchFamily="34" charset="0"/>
+                <a:ea typeface="Arial" pitchFamily="34" charset="-122"/>
+                <a:cs typeface="Arial" pitchFamily="34" charset="-120"/>
+              </a:rPr>
+              <a:t>○ ●</a:t>
+            </a:r>
+            <a:endParaRPr lang="en-US" sz="2400" dirty="0"/>
           </a:p>
         </p:txBody>
       </p:sp>
@@ -2845,6 +3018,45 @@
           </a:p>
         </p:txBody>
       </p:sp>
+      <p:sp>
+        <p:nvSpPr>
+          <p:cNvPr id="3" name="Text 1"/>
+          <p:cNvSpPr txBox="1"/>
+          <p:nvPr/>
+        </p:nvSpPr>
+        <p:spPr>
+          <a:xfrm>
+            <a:off x="9235440" y="6126480"/>
+            <a:ext cx="2743200" cy="548640"/>
+          </a:xfrm>
+          <a:prstGeom prst="rect">
+            <a:avLst/>
+          </a:prstGeom>
+          <a:noFill/>
+          <a:ln/>
+        </p:spPr>
+        <p:txBody>
+          <a:bodyPr wrap="square" lIns="0" tIns="0" rIns="0" bIns="0" rtlCol="0" anchor="ctr"/>
+          <a:lstStyle/>
+          <a:p>
+            <a:pPr algn="r" indent="0" marL="0">
+              <a:buNone/>
+            </a:pPr>
+            <a:r>
+              <a:rPr lang="en-US" sz="2400" dirty="0">
+                <a:solidFill>
+                  <a:srgbClr val="8A8A8A"/>
+                </a:solidFill>
+                <a:latin typeface="Arial" pitchFamily="34" charset="0"/>
+                <a:ea typeface="Arial" pitchFamily="34" charset="-122"/>
+                <a:cs typeface="Arial" pitchFamily="34" charset="-120"/>
+              </a:rPr>
+              <a:t>● ○</a:t>
+            </a:r>
+            <a:endParaRPr lang="en-US" sz="2400" dirty="0"/>
+          </a:p>
+        </p:txBody>
+      </p:sp>
     </p:spTree>
   </p:cSld>
   <p:clrMapOvr>
@@ -2967,6 +3179,45 @@
           </a:p>
         </p:txBody>
       </p:sp>
+      <p:sp>
+        <p:nvSpPr>
+          <p:cNvPr id="3" name="Text 1"/>
+          <p:cNvSpPr txBox="1"/>
+          <p:nvPr/>
+        </p:nvSpPr>
+        <p:spPr>
+          <a:xfrm>
+            <a:off x="9235440" y="6126480"/>
+            <a:ext cx="2743200" cy="548640"/>
+          </a:xfrm>
+          <a:prstGeom prst="rect">
+            <a:avLst/>
+          </a:prstGeom>
+          <a:noFill/>
+          <a:ln/>
+        </p:spPr>
+        <p:txBody>
+          <a:bodyPr wrap="square" lIns="0" tIns="0" rIns="0" bIns="0" rtlCol="0" anchor="ctr"/>
+          <a:lstStyle/>
+          <a:p>
+            <a:pPr algn="r" indent="0" marL="0">
+              <a:buNone/>
+            </a:pPr>
+            <a:r>
+              <a:rPr lang="en-US" sz="2400" dirty="0">
+                <a:solidFill>
+                  <a:srgbClr val="8A8A8A"/>
+                </a:solidFill>
+                <a:latin typeface="Arial" pitchFamily="34" charset="0"/>
+                <a:ea typeface="Arial" pitchFamily="34" charset="-122"/>
+                <a:cs typeface="Arial" pitchFamily="34" charset="-120"/>
+              </a:rPr>
+              <a:t>○ ●</a:t>
+            </a:r>
+            <a:endParaRPr lang="en-US" sz="2400" dirty="0"/>
+          </a:p>
+        </p:txBody>
+      </p:sp>
     </p:spTree>
   </p:cSld>
   <p:clrMapOvr>
@@ -3072,6 +3323,45 @@
           </a:p>
         </p:txBody>
       </p:sp>
+      <p:sp>
+        <p:nvSpPr>
+          <p:cNvPr id="3" name="Text 1"/>
+          <p:cNvSpPr txBox="1"/>
+          <p:nvPr/>
+        </p:nvSpPr>
+        <p:spPr>
+          <a:xfrm>
+            <a:off x="9235440" y="6126480"/>
+            <a:ext cx="2743200" cy="548640"/>
+          </a:xfrm>
+          <a:prstGeom prst="rect">
+            <a:avLst/>
+          </a:prstGeom>
+          <a:noFill/>
+          <a:ln/>
+        </p:spPr>
+        <p:txBody>
+          <a:bodyPr wrap="square" lIns="0" tIns="0" rIns="0" bIns="0" rtlCol="0" anchor="ctr"/>
+          <a:lstStyle/>
+          <a:p>
+            <a:pPr algn="r" indent="0" marL="0">
+              <a:buNone/>
+            </a:pPr>
+            <a:r>
+              <a:rPr lang="en-US" sz="2400" dirty="0">
+                <a:solidFill>
+                  <a:srgbClr val="8A8A8A"/>
+                </a:solidFill>
+                <a:latin typeface="Arial" pitchFamily="34" charset="0"/>
+                <a:ea typeface="Arial" pitchFamily="34" charset="-122"/>
+                <a:cs typeface="Arial" pitchFamily="34" charset="-120"/>
+              </a:rPr>
+              <a:t>● ○</a:t>
+            </a:r>
+            <a:endParaRPr lang="en-US" sz="2400" dirty="0"/>
+          </a:p>
+        </p:txBody>
+      </p:sp>
     </p:spTree>
   </p:cSld>
   <p:clrMapOvr>
@@ -3154,9 +3444,65 @@
                 <a:ea typeface="Arial" pitchFamily="34" charset="-122"/>
                 <a:cs typeface="Arial" pitchFamily="34" charset="-120"/>
               </a:rPr>
-              <a:t>my soul is satisfied in Him alone.</a:t>
+              <a:t>my soul is satisfied </a:t>
             </a:r>
             <a:endParaRPr lang="en-US" sz="4800" dirty="0"/>
+          </a:p>
+          <a:p>
+            <a:pPr algn="ctr" indent="0" marL="0">
+              <a:buNone/>
+            </a:pPr>
+            <a:r>
+              <a:rPr lang="en-US" sz="4800" b="1" i="1" dirty="0">
+                <a:solidFill>
+                  <a:srgbClr val="FFFFFF"/>
+                </a:solidFill>
+                <a:latin typeface="Arial" pitchFamily="34" charset="0"/>
+                <a:ea typeface="Arial" pitchFamily="34" charset="-122"/>
+                <a:cs typeface="Arial" pitchFamily="34" charset="-120"/>
+              </a:rPr>
+              <a:t>in Him alone.</a:t>
+            </a:r>
+            <a:endParaRPr lang="en-US" sz="4800" dirty="0"/>
+          </a:p>
+        </p:txBody>
+      </p:sp>
+      <p:sp>
+        <p:nvSpPr>
+          <p:cNvPr id="3" name="Text 1"/>
+          <p:cNvSpPr txBox="1"/>
+          <p:nvPr/>
+        </p:nvSpPr>
+        <p:spPr>
+          <a:xfrm>
+            <a:off x="9235440" y="6126480"/>
+            <a:ext cx="2743200" cy="548640"/>
+          </a:xfrm>
+          <a:prstGeom prst="rect">
+            <a:avLst/>
+          </a:prstGeom>
+          <a:noFill/>
+          <a:ln/>
+        </p:spPr>
+        <p:txBody>
+          <a:bodyPr wrap="square" lIns="0" tIns="0" rIns="0" bIns="0" rtlCol="0" anchor="ctr"/>
+          <a:lstStyle/>
+          <a:p>
+            <a:pPr algn="r" indent="0" marL="0">
+              <a:buNone/>
+            </a:pPr>
+            <a:r>
+              <a:rPr lang="en-US" sz="2400" dirty="0">
+                <a:solidFill>
+                  <a:srgbClr val="8A8A8A"/>
+                </a:solidFill>
+                <a:latin typeface="Arial" pitchFamily="34" charset="0"/>
+                <a:ea typeface="Arial" pitchFamily="34" charset="-122"/>
+                <a:cs typeface="Arial" pitchFamily="34" charset="-120"/>
+              </a:rPr>
+              <a:t>○ ●</a:t>
+            </a:r>
+            <a:endParaRPr lang="en-US" sz="2400" dirty="0"/>
           </a:p>
         </p:txBody>
       </p:sp>
@@ -3265,6 +3611,45 @@
           </a:p>
         </p:txBody>
       </p:sp>
+      <p:sp>
+        <p:nvSpPr>
+          <p:cNvPr id="3" name="Text 1"/>
+          <p:cNvSpPr txBox="1"/>
+          <p:nvPr/>
+        </p:nvSpPr>
+        <p:spPr>
+          <a:xfrm>
+            <a:off x="9235440" y="6126480"/>
+            <a:ext cx="2743200" cy="548640"/>
+          </a:xfrm>
+          <a:prstGeom prst="rect">
+            <a:avLst/>
+          </a:prstGeom>
+          <a:noFill/>
+          <a:ln/>
+        </p:spPr>
+        <p:txBody>
+          <a:bodyPr wrap="square" lIns="0" tIns="0" rIns="0" bIns="0" rtlCol="0" anchor="ctr"/>
+          <a:lstStyle/>
+          <a:p>
+            <a:pPr algn="r" indent="0" marL="0">
+              <a:buNone/>
+            </a:pPr>
+            <a:r>
+              <a:rPr lang="en-US" sz="2400" dirty="0">
+                <a:solidFill>
+                  <a:srgbClr val="8A8A8A"/>
+                </a:solidFill>
+                <a:latin typeface="Arial" pitchFamily="34" charset="0"/>
+                <a:ea typeface="Arial" pitchFamily="34" charset="-122"/>
+                <a:cs typeface="Arial" pitchFamily="34" charset="-120"/>
+              </a:rPr>
+              <a:t>● ○</a:t>
+            </a:r>
+            <a:endParaRPr lang="en-US" sz="2400" dirty="0"/>
+          </a:p>
+        </p:txBody>
+      </p:sp>
     </p:spTree>
   </p:cSld>
   <p:clrMapOvr>
@@ -3364,9 +3749,65 @@
                 <a:ea typeface="Arial" pitchFamily="34" charset="-122"/>
                 <a:cs typeface="Arial" pitchFamily="34" charset="-120"/>
               </a:rPr>
-              <a:t>But I will boast in knowing Christ at the cross.</a:t>
+              <a:t>But I will boast in knowing Christ </a:t>
             </a:r>
             <a:endParaRPr lang="en-US" sz="4800" dirty="0"/>
+          </a:p>
+          <a:p>
+            <a:pPr algn="ctr" indent="0" marL="0">
+              <a:buNone/>
+            </a:pPr>
+            <a:r>
+              <a:rPr lang="en-US" sz="4800" b="1" dirty="0">
+                <a:solidFill>
+                  <a:srgbClr val="FFFFFF"/>
+                </a:solidFill>
+                <a:latin typeface="Arial" pitchFamily="34" charset="0"/>
+                <a:ea typeface="Arial" pitchFamily="34" charset="-122"/>
+                <a:cs typeface="Arial" pitchFamily="34" charset="-120"/>
+              </a:rPr>
+              <a:t>at the cross.</a:t>
+            </a:r>
+            <a:endParaRPr lang="en-US" sz="4800" dirty="0"/>
+          </a:p>
+        </p:txBody>
+      </p:sp>
+      <p:sp>
+        <p:nvSpPr>
+          <p:cNvPr id="3" name="Text 1"/>
+          <p:cNvSpPr txBox="1"/>
+          <p:nvPr/>
+        </p:nvSpPr>
+        <p:spPr>
+          <a:xfrm>
+            <a:off x="9235440" y="6126480"/>
+            <a:ext cx="2743200" cy="548640"/>
+          </a:xfrm>
+          <a:prstGeom prst="rect">
+            <a:avLst/>
+          </a:prstGeom>
+          <a:noFill/>
+          <a:ln/>
+        </p:spPr>
+        <p:txBody>
+          <a:bodyPr wrap="square" lIns="0" tIns="0" rIns="0" bIns="0" rtlCol="0" anchor="ctr"/>
+          <a:lstStyle/>
+          <a:p>
+            <a:pPr algn="r" indent="0" marL="0">
+              <a:buNone/>
+            </a:pPr>
+            <a:r>
+              <a:rPr lang="en-US" sz="2400" dirty="0">
+                <a:solidFill>
+                  <a:srgbClr val="8A8A8A"/>
+                </a:solidFill>
+                <a:latin typeface="Arial" pitchFamily="34" charset="0"/>
+                <a:ea typeface="Arial" pitchFamily="34" charset="-122"/>
+                <a:cs typeface="Arial" pitchFamily="34" charset="-120"/>
+              </a:rPr>
+              <a:t>○ ●</a:t>
+            </a:r>
+            <a:endParaRPr lang="en-US" sz="2400" dirty="0"/>
           </a:p>
         </p:txBody>
       </p:sp>
@@ -3475,6 +3916,45 @@
           </a:p>
         </p:txBody>
       </p:sp>
+      <p:sp>
+        <p:nvSpPr>
+          <p:cNvPr id="3" name="Text 1"/>
+          <p:cNvSpPr txBox="1"/>
+          <p:nvPr/>
+        </p:nvSpPr>
+        <p:spPr>
+          <a:xfrm>
+            <a:off x="9235440" y="6126480"/>
+            <a:ext cx="2743200" cy="548640"/>
+          </a:xfrm>
+          <a:prstGeom prst="rect">
+            <a:avLst/>
+          </a:prstGeom>
+          <a:noFill/>
+          <a:ln/>
+        </p:spPr>
+        <p:txBody>
+          <a:bodyPr wrap="square" lIns="0" tIns="0" rIns="0" bIns="0" rtlCol="0" anchor="ctr"/>
+          <a:lstStyle/>
+          <a:p>
+            <a:pPr algn="r" indent="0" marL="0">
+              <a:buNone/>
+            </a:pPr>
+            <a:r>
+              <a:rPr lang="en-US" sz="2400" dirty="0">
+                <a:solidFill>
+                  <a:srgbClr val="8A8A8A"/>
+                </a:solidFill>
+                <a:latin typeface="Arial" pitchFamily="34" charset="0"/>
+                <a:ea typeface="Arial" pitchFamily="34" charset="-122"/>
+                <a:cs typeface="Arial" pitchFamily="34" charset="-120"/>
+              </a:rPr>
+              <a:t>● ○</a:t>
+            </a:r>
+            <a:endParaRPr lang="en-US" sz="2400" dirty="0"/>
+          </a:p>
+        </p:txBody>
+      </p:sp>
     </p:spTree>
   </p:cSld>
   <p:clrMapOvr>
@@ -3560,6 +4040,45 @@
               <a:t>my soul is satisfied in Him alone.</a:t>
             </a:r>
             <a:endParaRPr lang="en-US" sz="4800" dirty="0"/>
+          </a:p>
+        </p:txBody>
+      </p:sp>
+      <p:sp>
+        <p:nvSpPr>
+          <p:cNvPr id="3" name="Text 1"/>
+          <p:cNvSpPr txBox="1"/>
+          <p:nvPr/>
+        </p:nvSpPr>
+        <p:spPr>
+          <a:xfrm>
+            <a:off x="9235440" y="6126480"/>
+            <a:ext cx="2743200" cy="548640"/>
+          </a:xfrm>
+          <a:prstGeom prst="rect">
+            <a:avLst/>
+          </a:prstGeom>
+          <a:noFill/>
+          <a:ln/>
+        </p:spPr>
+        <p:txBody>
+          <a:bodyPr wrap="square" lIns="0" tIns="0" rIns="0" bIns="0" rtlCol="0" anchor="ctr"/>
+          <a:lstStyle/>
+          <a:p>
+            <a:pPr algn="r" indent="0" marL="0">
+              <a:buNone/>
+            </a:pPr>
+            <a:r>
+              <a:rPr lang="en-US" sz="2400" dirty="0">
+                <a:solidFill>
+                  <a:srgbClr val="8A8A8A"/>
+                </a:solidFill>
+                <a:latin typeface="Arial" pitchFamily="34" charset="0"/>
+                <a:ea typeface="Arial" pitchFamily="34" charset="-122"/>
+                <a:cs typeface="Arial" pitchFamily="34" charset="-120"/>
+              </a:rPr>
+              <a:t>○ ●</a:t>
+            </a:r>
+            <a:endParaRPr lang="en-US" sz="2400" dirty="0"/>
           </a:p>
         </p:txBody>
       </p:sp>

--- a/fubc-en/5-My Worth Is Not In What I Own.pptx
+++ b/fubc-en/5-My Worth Is Not In What I Own.pptx
@@ -2129,8 +2129,8 @@
         </p:nvSpPr>
         <p:spPr>
           <a:xfrm>
-            <a:off x="548640" y="457200"/>
-            <a:ext cx="11064240" cy="5943600"/>
+            <a:off x="292608" y="457200"/>
+            <a:ext cx="11612880" cy="5943600"/>
           </a:xfrm>
           <a:prstGeom prst="rect">
             <a:avLst/>
@@ -2146,7 +2146,7 @@
               <a:buNone/>
             </a:pPr>
             <a:r>
-              <a:rPr lang="en-US" sz="4800" b="1" dirty="0">
+              <a:rPr lang="en-US" sz="5000" b="1" dirty="0">
                 <a:solidFill>
                   <a:srgbClr val="FFFFFF"/>
                 </a:solidFill>
@@ -2156,7 +2156,7 @@
               </a:rPr>
               <a:t>My Worth Is Not In What I Own</a:t>
             </a:r>
-            <a:endParaRPr lang="en-US" sz="4800" dirty="0"/>
+            <a:endParaRPr lang="en-US" sz="5000" dirty="0"/>
           </a:p>
         </p:txBody>
       </p:sp>
@@ -2200,8 +2200,8 @@
         </p:nvSpPr>
         <p:spPr>
           <a:xfrm>
-            <a:off x="548640" y="457200"/>
-            <a:ext cx="11064240" cy="5943600"/>
+            <a:off x="292608" y="457200"/>
+            <a:ext cx="11612880" cy="5943600"/>
           </a:xfrm>
           <a:prstGeom prst="rect">
             <a:avLst/>
@@ -2217,7 +2217,7 @@
               <a:buNone/>
             </a:pPr>
             <a:r>
-              <a:rPr lang="en-US" sz="4800" b="1" dirty="0">
+              <a:rPr lang="en-US" sz="5000" b="1" dirty="0">
                 <a:solidFill>
                   <a:srgbClr val="FFFFFF"/>
                 </a:solidFill>
@@ -2227,14 +2227,14 @@
               </a:rPr>
               <a:t>Two wonders here that I confess:</a:t>
             </a:r>
-            <a:endParaRPr lang="en-US" sz="4800" dirty="0"/>
+            <a:endParaRPr lang="en-US" sz="5000" dirty="0"/>
           </a:p>
           <a:p>
             <a:pPr algn="ctr" indent="0" marL="0">
               <a:buNone/>
             </a:pPr>
             <a:r>
-              <a:rPr lang="en-US" sz="4800" b="1" dirty="0">
+              <a:rPr lang="en-US" sz="5000" b="1" dirty="0">
                 <a:solidFill>
                   <a:srgbClr val="FFFFFF"/>
                 </a:solidFill>
@@ -2244,14 +2244,14 @@
               </a:rPr>
               <a:t>my worth and my unworthiness.</a:t>
             </a:r>
-            <a:endParaRPr lang="en-US" sz="4800" dirty="0"/>
+            <a:endParaRPr lang="en-US" sz="5000" dirty="0"/>
           </a:p>
           <a:p>
             <a:pPr algn="ctr" indent="0" marL="0">
               <a:buNone/>
             </a:pPr>
             <a:r>
-              <a:rPr lang="en-US" sz="4800" b="1" dirty="0">
+              <a:rPr lang="en-US" sz="5000" b="1" dirty="0">
                 <a:solidFill>
                   <a:srgbClr val="FFFFFF"/>
                 </a:solidFill>
@@ -2259,16 +2259,16 @@
                 <a:ea typeface="Arial" pitchFamily="34" charset="-122"/>
                 <a:cs typeface="Arial" pitchFamily="34" charset="-120"/>
               </a:rPr>
-              <a:t>My value fixed – my ransom paid </a:t>
-            </a:r>
-            <a:endParaRPr lang="en-US" sz="4800" dirty="0"/>
+              <a:t>My value fixed – my ransom paid</a:t>
+            </a:r>
+            <a:endParaRPr lang="en-US" sz="5000" dirty="0"/>
           </a:p>
           <a:p>
             <a:pPr algn="ctr" indent="0" marL="0">
               <a:buNone/>
             </a:pPr>
             <a:r>
-              <a:rPr lang="en-US" sz="4800" b="1" dirty="0">
+              <a:rPr lang="en-US" sz="5000" b="1" dirty="0">
                 <a:solidFill>
                   <a:srgbClr val="FFFFFF"/>
                 </a:solidFill>
@@ -2278,7 +2278,7 @@
               </a:rPr>
               <a:t>at the cross.</a:t>
             </a:r>
-            <a:endParaRPr lang="en-US" sz="4800" dirty="0"/>
+            <a:endParaRPr lang="en-US" sz="5000" dirty="0"/>
           </a:p>
         </p:txBody>
       </p:sp>
@@ -2322,8 +2322,8 @@
         </p:nvSpPr>
         <p:spPr>
           <a:xfrm>
-            <a:off x="548640" y="457200"/>
-            <a:ext cx="11064240" cy="5943600"/>
+            <a:off x="292608" y="457200"/>
+            <a:ext cx="11612880" cy="5943600"/>
           </a:xfrm>
           <a:prstGeom prst="rect">
             <a:avLst/>
@@ -2339,7 +2339,7 @@
               <a:buNone/>
             </a:pPr>
             <a:r>
-              <a:rPr lang="en-US" sz="4800" b="1" i="1" dirty="0">
+              <a:rPr lang="en-US" sz="5000" b="1" i="1" dirty="0">
                 <a:solidFill>
                   <a:srgbClr val="FFFFFF"/>
                 </a:solidFill>
@@ -2349,14 +2349,14 @@
               </a:rPr>
               <a:t>I rejoice in my Redeemer,</a:t>
             </a:r>
-            <a:endParaRPr lang="en-US" sz="4800" dirty="0"/>
+            <a:endParaRPr lang="en-US" sz="5000" dirty="0"/>
           </a:p>
           <a:p>
             <a:pPr algn="ctr" indent="0" marL="0">
               <a:buNone/>
             </a:pPr>
             <a:r>
-              <a:rPr lang="en-US" sz="4800" b="1" i="1" dirty="0">
+              <a:rPr lang="en-US" sz="5000" b="1" i="1" dirty="0">
                 <a:solidFill>
                   <a:srgbClr val="FFFFFF"/>
                 </a:solidFill>
@@ -2366,14 +2366,14 @@
               </a:rPr>
               <a:t>Greatest Treasure,</a:t>
             </a:r>
-            <a:endParaRPr lang="en-US" sz="4800" dirty="0"/>
+            <a:endParaRPr lang="en-US" sz="5000" dirty="0"/>
           </a:p>
           <a:p>
             <a:pPr algn="ctr" indent="0" marL="0">
               <a:buNone/>
             </a:pPr>
             <a:r>
-              <a:rPr lang="en-US" sz="4800" b="1" i="1" dirty="0">
+              <a:rPr lang="en-US" sz="5000" b="1" i="1" dirty="0">
                 <a:solidFill>
                   <a:srgbClr val="FFFFFF"/>
                 </a:solidFill>
@@ -2383,7 +2383,7 @@
               </a:rPr>
               <a:t>Wellspring of my soul.</a:t>
             </a:r>
-            <a:endParaRPr lang="en-US" sz="4800" dirty="0"/>
+            <a:endParaRPr lang="en-US" sz="5000" dirty="0"/>
           </a:p>
         </p:txBody>
       </p:sp>
@@ -2466,8 +2466,8 @@
         </p:nvSpPr>
         <p:spPr>
           <a:xfrm>
-            <a:off x="548640" y="457200"/>
-            <a:ext cx="11064240" cy="5943600"/>
+            <a:off x="292608" y="457200"/>
+            <a:ext cx="11612880" cy="5943600"/>
           </a:xfrm>
           <a:prstGeom prst="rect">
             <a:avLst/>
@@ -2483,7 +2483,7 @@
               <a:buNone/>
             </a:pPr>
             <a:r>
-              <a:rPr lang="en-US" sz="4800" b="1" i="1" dirty="0">
+              <a:rPr lang="en-US" sz="5000" b="1" i="1" dirty="0">
                 <a:solidFill>
                   <a:srgbClr val="FFFFFF"/>
                 </a:solidFill>
@@ -2493,14 +2493,14 @@
               </a:rPr>
               <a:t>I will trust in Him, no other,</a:t>
             </a:r>
-            <a:endParaRPr lang="en-US" sz="4800" dirty="0"/>
+            <a:endParaRPr lang="en-US" sz="5000" dirty="0"/>
           </a:p>
           <a:p>
             <a:pPr algn="ctr" indent="0" marL="0">
               <a:buNone/>
             </a:pPr>
             <a:r>
-              <a:rPr lang="en-US" sz="4800" b="1" i="1" dirty="0">
+              <a:rPr lang="en-US" sz="5000" b="1" i="1" dirty="0">
                 <a:solidFill>
                   <a:srgbClr val="FFFFFF"/>
                 </a:solidFill>
@@ -2510,7 +2510,7 @@
               </a:rPr>
               <a:t>my soul is satisfied in Him alone.</a:t>
             </a:r>
-            <a:endParaRPr lang="en-US" sz="4800" dirty="0"/>
+            <a:endParaRPr lang="en-US" sz="5000" dirty="0"/>
           </a:p>
         </p:txBody>
       </p:sp>
@@ -2593,8 +2593,8 @@
         </p:nvSpPr>
         <p:spPr>
           <a:xfrm>
-            <a:off x="548640" y="457200"/>
-            <a:ext cx="11064240" cy="5943600"/>
+            <a:off x="292608" y="457200"/>
+            <a:ext cx="11612880" cy="5943600"/>
           </a:xfrm>
           <a:prstGeom prst="rect">
             <a:avLst/>
@@ -2610,7 +2610,7 @@
               <a:buNone/>
             </a:pPr>
             <a:r>
-              <a:rPr lang="en-US" sz="4800" b="1" i="1" dirty="0">
+              <a:rPr lang="en-US" sz="5000" b="1" i="1" dirty="0">
                 <a:solidFill>
                   <a:srgbClr val="FFFFFF"/>
                 </a:solidFill>
@@ -2620,14 +2620,14 @@
               </a:rPr>
               <a:t>I rejoice in my Redeemer,</a:t>
             </a:r>
-            <a:endParaRPr lang="en-US" sz="4800" dirty="0"/>
+            <a:endParaRPr lang="en-US" sz="5000" dirty="0"/>
           </a:p>
           <a:p>
             <a:pPr algn="ctr" indent="0" marL="0">
               <a:buNone/>
             </a:pPr>
             <a:r>
-              <a:rPr lang="en-US" sz="4800" b="1" i="1" dirty="0">
+              <a:rPr lang="en-US" sz="5000" b="1" i="1" dirty="0">
                 <a:solidFill>
                   <a:srgbClr val="FFFFFF"/>
                 </a:solidFill>
@@ -2637,14 +2637,14 @@
               </a:rPr>
               <a:t>Greatest Treasure,</a:t>
             </a:r>
-            <a:endParaRPr lang="en-US" sz="4800" dirty="0"/>
+            <a:endParaRPr lang="en-US" sz="5000" dirty="0"/>
           </a:p>
           <a:p>
             <a:pPr algn="ctr" indent="0" marL="0">
               <a:buNone/>
             </a:pPr>
             <a:r>
-              <a:rPr lang="en-US" sz="4800" b="1" i="1" dirty="0">
+              <a:rPr lang="en-US" sz="5000" b="1" i="1" dirty="0">
                 <a:solidFill>
                   <a:srgbClr val="FFFFFF"/>
                 </a:solidFill>
@@ -2654,7 +2654,7 @@
               </a:rPr>
               <a:t>Wellspring of my soul.</a:t>
             </a:r>
-            <a:endParaRPr lang="en-US" sz="4800" dirty="0"/>
+            <a:endParaRPr lang="en-US" sz="5000" dirty="0"/>
           </a:p>
         </p:txBody>
       </p:sp>
@@ -2737,8 +2737,8 @@
         </p:nvSpPr>
         <p:spPr>
           <a:xfrm>
-            <a:off x="548640" y="457200"/>
-            <a:ext cx="11064240" cy="5943600"/>
+            <a:off x="292608" y="457200"/>
+            <a:ext cx="11612880" cy="5943600"/>
           </a:xfrm>
           <a:prstGeom prst="rect">
             <a:avLst/>
@@ -2754,7 +2754,7 @@
               <a:buNone/>
             </a:pPr>
             <a:r>
-              <a:rPr lang="en-US" sz="4800" b="1" i="1" dirty="0">
+              <a:rPr lang="en-US" sz="5000" b="1" i="1" dirty="0">
                 <a:solidFill>
                   <a:srgbClr val="FFFFFF"/>
                 </a:solidFill>
@@ -2764,14 +2764,14 @@
               </a:rPr>
               <a:t>I will trust in Him, no other,</a:t>
             </a:r>
-            <a:endParaRPr lang="en-US" sz="4800" dirty="0"/>
+            <a:endParaRPr lang="en-US" sz="5000" dirty="0"/>
           </a:p>
           <a:p>
             <a:pPr algn="ctr" indent="0" marL="0">
               <a:buNone/>
             </a:pPr>
             <a:r>
-              <a:rPr lang="en-US" sz="4800" b="1" i="1" dirty="0">
+              <a:rPr lang="en-US" sz="5000" b="1" i="1" dirty="0">
                 <a:solidFill>
                   <a:srgbClr val="FFFFFF"/>
                 </a:solidFill>
@@ -2781,14 +2781,14 @@
               </a:rPr>
               <a:t>My soul is satisfied in Him alone.</a:t>
             </a:r>
-            <a:endParaRPr lang="en-US" sz="4800" dirty="0"/>
+            <a:endParaRPr lang="en-US" sz="5000" dirty="0"/>
           </a:p>
           <a:p>
             <a:pPr algn="ctr" indent="0" marL="0">
               <a:buNone/>
             </a:pPr>
             <a:r>
-              <a:rPr lang="en-US" sz="4800" b="1" i="1" dirty="0">
+              <a:rPr lang="en-US" sz="5000" b="1" i="1" dirty="0">
                 <a:solidFill>
                   <a:srgbClr val="FFFFFF"/>
                 </a:solidFill>
@@ -2798,20 +2798,20 @@
               </a:rPr>
               <a:t>My soul is satisfied in Him alone.</a:t>
             </a:r>
-            <a:endParaRPr lang="en-US" sz="4800" dirty="0"/>
+            <a:endParaRPr lang="en-US" sz="5000" dirty="0"/>
           </a:p>
           <a:p>
             <a:pPr algn="ctr" indent="0" marL="0">
               <a:buNone/>
             </a:pPr>
-            <a:endParaRPr lang="en-US" sz="4800" dirty="0"/>
+            <a:endParaRPr lang="en-US" sz="5000" dirty="0"/>
           </a:p>
           <a:p>
             <a:pPr algn="ctr" indent="0" marL="0">
               <a:buNone/>
             </a:pPr>
             <a:r>
-              <a:rPr lang="en-US" sz="4800" b="1" i="1" dirty="0">
+              <a:rPr lang="en-US" sz="5000" b="1" i="1" dirty="0">
                 <a:solidFill>
                   <a:srgbClr val="FFFFFF"/>
                 </a:solidFill>
@@ -2821,7 +2821,7 @@
               </a:rPr>
               <a:t>***</a:t>
             </a:r>
-            <a:endParaRPr lang="en-US" sz="4800" dirty="0"/>
+            <a:endParaRPr lang="en-US" sz="5000" dirty="0"/>
           </a:p>
         </p:txBody>
       </p:sp>
@@ -2936,8 +2936,8 @@
         </p:nvSpPr>
         <p:spPr>
           <a:xfrm>
-            <a:off x="548640" y="457200"/>
-            <a:ext cx="11064240" cy="5943600"/>
+            <a:off x="292608" y="457200"/>
+            <a:ext cx="11612880" cy="5943600"/>
           </a:xfrm>
           <a:prstGeom prst="rect">
             <a:avLst/>
@@ -2953,7 +2953,7 @@
               <a:buNone/>
             </a:pPr>
             <a:r>
-              <a:rPr lang="en-US" sz="4800" b="1" dirty="0">
+              <a:rPr lang="en-US" sz="5000" b="1" dirty="0">
                 <a:solidFill>
                   <a:srgbClr val="FFFFFF"/>
                 </a:solidFill>
@@ -2963,14 +2963,14 @@
               </a:rPr>
               <a:t>My worth is not in what I own,</a:t>
             </a:r>
-            <a:endParaRPr lang="en-US" sz="4800" dirty="0"/>
+            <a:endParaRPr lang="en-US" sz="5000" dirty="0"/>
           </a:p>
           <a:p>
             <a:pPr algn="ctr" indent="0" marL="0">
               <a:buNone/>
             </a:pPr>
             <a:r>
-              <a:rPr lang="en-US" sz="4800" b="1" dirty="0">
+              <a:rPr lang="en-US" sz="5000" b="1" dirty="0">
                 <a:solidFill>
                   <a:srgbClr val="FFFFFF"/>
                 </a:solidFill>
@@ -2978,16 +2978,16 @@
                 <a:ea typeface="Arial" pitchFamily="34" charset="-122"/>
                 <a:cs typeface="Arial" pitchFamily="34" charset="-120"/>
               </a:rPr>
-              <a:t>not in the strength of flesh and bone.</a:t>
-            </a:r>
-            <a:endParaRPr lang="en-US" sz="4800" dirty="0"/>
+              <a:t>not in the strength of flesh and bone</a:t>
+            </a:r>
+            <a:endParaRPr lang="en-US" sz="5000" dirty="0"/>
           </a:p>
           <a:p>
             <a:pPr algn="ctr" indent="0" marL="0">
               <a:buNone/>
             </a:pPr>
             <a:r>
-              <a:rPr lang="en-US" sz="4800" b="1" dirty="0">
+              <a:rPr lang="en-US" sz="5000" b="1" dirty="0">
                 <a:solidFill>
                   <a:srgbClr val="FFFFFF"/>
                 </a:solidFill>
@@ -2997,14 +2997,14 @@
               </a:rPr>
               <a:t>But in the costly wounds of love,</a:t>
             </a:r>
-            <a:endParaRPr lang="en-US" sz="4800" dirty="0"/>
+            <a:endParaRPr lang="en-US" sz="5000" dirty="0"/>
           </a:p>
           <a:p>
             <a:pPr algn="ctr" indent="0" marL="0">
               <a:buNone/>
             </a:pPr>
             <a:r>
-              <a:rPr lang="en-US" sz="4800" b="1" dirty="0">
+              <a:rPr lang="en-US" sz="5000" b="1" dirty="0">
                 <a:solidFill>
                   <a:srgbClr val="FFFFFF"/>
                 </a:solidFill>
@@ -3014,7 +3014,7 @@
               </a:rPr>
               <a:t>at the cross.</a:t>
             </a:r>
-            <a:endParaRPr lang="en-US" sz="4800" dirty="0"/>
+            <a:endParaRPr lang="en-US" sz="5000" dirty="0"/>
           </a:p>
         </p:txBody>
       </p:sp>
@@ -3097,8 +3097,8 @@
         </p:nvSpPr>
         <p:spPr>
           <a:xfrm>
-            <a:off x="548640" y="457200"/>
-            <a:ext cx="11064240" cy="5943600"/>
+            <a:off x="292608" y="457200"/>
+            <a:ext cx="11612880" cy="5943600"/>
           </a:xfrm>
           <a:prstGeom prst="rect">
             <a:avLst/>
@@ -3114,7 +3114,7 @@
               <a:buNone/>
             </a:pPr>
             <a:r>
-              <a:rPr lang="en-US" sz="4800" b="1" dirty="0">
+              <a:rPr lang="en-US" sz="5000" b="1" dirty="0">
                 <a:solidFill>
                   <a:srgbClr val="FFFFFF"/>
                 </a:solidFill>
@@ -3124,14 +3124,14 @@
               </a:rPr>
               <a:t>My worth is not in skill or name,</a:t>
             </a:r>
-            <a:endParaRPr lang="en-US" sz="4800" dirty="0"/>
+            <a:endParaRPr lang="en-US" sz="5000" dirty="0"/>
           </a:p>
           <a:p>
             <a:pPr algn="ctr" indent="0" marL="0">
               <a:buNone/>
             </a:pPr>
             <a:r>
-              <a:rPr lang="en-US" sz="4800" b="1" dirty="0">
+              <a:rPr lang="en-US" sz="5000" b="1" dirty="0">
                 <a:solidFill>
                   <a:srgbClr val="FFFFFF"/>
                 </a:solidFill>
@@ -3141,14 +3141,14 @@
               </a:rPr>
               <a:t>in win or lose, in pride or shame.</a:t>
             </a:r>
-            <a:endParaRPr lang="en-US" sz="4800" dirty="0"/>
+            <a:endParaRPr lang="en-US" sz="5000" dirty="0"/>
           </a:p>
           <a:p>
             <a:pPr algn="ctr" indent="0" marL="0">
               <a:buNone/>
             </a:pPr>
             <a:r>
-              <a:rPr lang="en-US" sz="4800" b="1" dirty="0">
+              <a:rPr lang="en-US" sz="5000" b="1" dirty="0">
                 <a:solidFill>
                   <a:srgbClr val="FFFFFF"/>
                 </a:solidFill>
@@ -3158,14 +3158,14 @@
               </a:rPr>
               <a:t>But in the blood of Christ that flowed</a:t>
             </a:r>
-            <a:endParaRPr lang="en-US" sz="4800" dirty="0"/>
+            <a:endParaRPr lang="en-US" sz="5000" dirty="0"/>
           </a:p>
           <a:p>
             <a:pPr algn="ctr" indent="0" marL="0">
               <a:buNone/>
             </a:pPr>
             <a:r>
-              <a:rPr lang="en-US" sz="4800" b="1" dirty="0">
+              <a:rPr lang="en-US" sz="5000" b="1" dirty="0">
                 <a:solidFill>
                   <a:srgbClr val="FFFFFF"/>
                 </a:solidFill>
@@ -3175,7 +3175,7 @@
               </a:rPr>
               <a:t>at the cross.</a:t>
             </a:r>
-            <a:endParaRPr lang="en-US" sz="4800" dirty="0"/>
+            <a:endParaRPr lang="en-US" sz="5000" dirty="0"/>
           </a:p>
         </p:txBody>
       </p:sp>
@@ -3258,8 +3258,8 @@
         </p:nvSpPr>
         <p:spPr>
           <a:xfrm>
-            <a:off x="548640" y="457200"/>
-            <a:ext cx="11064240" cy="5943600"/>
+            <a:off x="292608" y="457200"/>
+            <a:ext cx="11612880" cy="5943600"/>
           </a:xfrm>
           <a:prstGeom prst="rect">
             <a:avLst/>
@@ -3275,7 +3275,7 @@
               <a:buNone/>
             </a:pPr>
             <a:r>
-              <a:rPr lang="en-US" sz="4800" b="1" i="1" dirty="0">
+              <a:rPr lang="en-US" sz="5000" b="1" i="1" dirty="0">
                 <a:solidFill>
                   <a:srgbClr val="FFFFFF"/>
                 </a:solidFill>
@@ -3285,14 +3285,14 @@
               </a:rPr>
               <a:t>I rejoice in my Redeemer,</a:t>
             </a:r>
-            <a:endParaRPr lang="en-US" sz="4800" dirty="0"/>
+            <a:endParaRPr lang="en-US" sz="5000" dirty="0"/>
           </a:p>
           <a:p>
             <a:pPr algn="ctr" indent="0" marL="0">
               <a:buNone/>
             </a:pPr>
             <a:r>
-              <a:rPr lang="en-US" sz="4800" b="1" i="1" dirty="0">
+              <a:rPr lang="en-US" sz="5000" b="1" i="1" dirty="0">
                 <a:solidFill>
                   <a:srgbClr val="FFFFFF"/>
                 </a:solidFill>
@@ -3302,14 +3302,14 @@
               </a:rPr>
               <a:t>Greatest Treasure,</a:t>
             </a:r>
-            <a:endParaRPr lang="en-US" sz="4800" dirty="0"/>
+            <a:endParaRPr lang="en-US" sz="5000" dirty="0"/>
           </a:p>
           <a:p>
             <a:pPr algn="ctr" indent="0" marL="0">
               <a:buNone/>
             </a:pPr>
             <a:r>
-              <a:rPr lang="en-US" sz="4800" b="1" i="1" dirty="0">
+              <a:rPr lang="en-US" sz="5000" b="1" i="1" dirty="0">
                 <a:solidFill>
                   <a:srgbClr val="FFFFFF"/>
                 </a:solidFill>
@@ -3319,7 +3319,7 @@
               </a:rPr>
               <a:t>Wellspring of my soul.</a:t>
             </a:r>
-            <a:endParaRPr lang="en-US" sz="4800" dirty="0"/>
+            <a:endParaRPr lang="en-US" sz="5000" dirty="0"/>
           </a:p>
         </p:txBody>
       </p:sp>
@@ -3402,8 +3402,8 @@
         </p:nvSpPr>
         <p:spPr>
           <a:xfrm>
-            <a:off x="548640" y="457200"/>
-            <a:ext cx="11064240" cy="5943600"/>
+            <a:off x="292608" y="457200"/>
+            <a:ext cx="11612880" cy="5943600"/>
           </a:xfrm>
           <a:prstGeom prst="rect">
             <a:avLst/>
@@ -3419,7 +3419,7 @@
               <a:buNone/>
             </a:pPr>
             <a:r>
-              <a:rPr lang="en-US" sz="4800" b="1" i="1" dirty="0">
+              <a:rPr lang="en-US" sz="5000" b="1" i="1" dirty="0">
                 <a:solidFill>
                   <a:srgbClr val="FFFFFF"/>
                 </a:solidFill>
@@ -3429,14 +3429,14 @@
               </a:rPr>
               <a:t>I will trust in Him, no other,</a:t>
             </a:r>
-            <a:endParaRPr lang="en-US" sz="4800" dirty="0"/>
+            <a:endParaRPr lang="en-US" sz="5000" dirty="0"/>
           </a:p>
           <a:p>
             <a:pPr algn="ctr" indent="0" marL="0">
               <a:buNone/>
             </a:pPr>
             <a:r>
-              <a:rPr lang="en-US" sz="4800" b="1" i="1" dirty="0">
+              <a:rPr lang="en-US" sz="5000" b="1" i="1" dirty="0">
                 <a:solidFill>
                   <a:srgbClr val="FFFFFF"/>
                 </a:solidFill>
@@ -3444,16 +3444,16 @@
                 <a:ea typeface="Arial" pitchFamily="34" charset="-122"/>
                 <a:cs typeface="Arial" pitchFamily="34" charset="-120"/>
               </a:rPr>
-              <a:t>my soul is satisfied </a:t>
-            </a:r>
-            <a:endParaRPr lang="en-US" sz="4800" dirty="0"/>
+              <a:t>my soul is satisfied</a:t>
+            </a:r>
+            <a:endParaRPr lang="en-US" sz="5000" dirty="0"/>
           </a:p>
           <a:p>
             <a:pPr algn="ctr" indent="0" marL="0">
               <a:buNone/>
             </a:pPr>
             <a:r>
-              <a:rPr lang="en-US" sz="4800" b="1" i="1" dirty="0">
+              <a:rPr lang="en-US" sz="5000" b="1" i="1" dirty="0">
                 <a:solidFill>
                   <a:srgbClr val="FFFFFF"/>
                 </a:solidFill>
@@ -3463,7 +3463,7 @@
               </a:rPr>
               <a:t>in Him alone.</a:t>
             </a:r>
-            <a:endParaRPr lang="en-US" sz="4800" dirty="0"/>
+            <a:endParaRPr lang="en-US" sz="5000" dirty="0"/>
           </a:p>
         </p:txBody>
       </p:sp>
@@ -3546,8 +3546,8 @@
         </p:nvSpPr>
         <p:spPr>
           <a:xfrm>
-            <a:off x="548640" y="457200"/>
-            <a:ext cx="11064240" cy="5943600"/>
+            <a:off x="292608" y="457200"/>
+            <a:ext cx="11612880" cy="5943600"/>
           </a:xfrm>
           <a:prstGeom prst="rect">
             <a:avLst/>
@@ -3563,7 +3563,7 @@
               <a:buNone/>
             </a:pPr>
             <a:r>
-              <a:rPr lang="en-US" sz="4800" b="1" dirty="0">
+              <a:rPr lang="en-US" sz="4900" b="1" dirty="0">
                 <a:solidFill>
                   <a:srgbClr val="FFFFFF"/>
                 </a:solidFill>
@@ -3571,16 +3571,16 @@
                 <a:ea typeface="Arial" pitchFamily="34" charset="-122"/>
                 <a:cs typeface="Arial" pitchFamily="34" charset="-120"/>
               </a:rPr>
-              <a:t>As summer flowers we fade and die.</a:t>
-            </a:r>
-            <a:endParaRPr lang="en-US" sz="4800" dirty="0"/>
+              <a:t>As summer flowers we fade and die</a:t>
+            </a:r>
+            <a:endParaRPr lang="en-US" sz="4900" dirty="0"/>
           </a:p>
           <a:p>
             <a:pPr algn="ctr" indent="0" marL="0">
               <a:buNone/>
             </a:pPr>
             <a:r>
-              <a:rPr lang="en-US" sz="4800" b="1" dirty="0">
+              <a:rPr lang="en-US" sz="4900" b="1" dirty="0">
                 <a:solidFill>
                   <a:srgbClr val="FFFFFF"/>
                 </a:solidFill>
@@ -3588,16 +3588,16 @@
                 <a:ea typeface="Arial" pitchFamily="34" charset="-122"/>
                 <a:cs typeface="Arial" pitchFamily="34" charset="-120"/>
               </a:rPr>
-              <a:t>Fame, youth and beauty hurry by.</a:t>
-            </a:r>
-            <a:endParaRPr lang="en-US" sz="4800" dirty="0"/>
+              <a:t>Fame, youth and beauty hurry by</a:t>
+            </a:r>
+            <a:endParaRPr lang="en-US" sz="4900" dirty="0"/>
           </a:p>
           <a:p>
             <a:pPr algn="ctr" indent="0" marL="0">
               <a:buNone/>
             </a:pPr>
             <a:r>
-              <a:rPr lang="en-US" sz="4800" b="1" dirty="0">
+              <a:rPr lang="en-US" sz="4900" b="1" dirty="0">
                 <a:solidFill>
                   <a:srgbClr val="FFFFFF"/>
                 </a:solidFill>
@@ -3605,9 +3605,9 @@
                 <a:ea typeface="Arial" pitchFamily="34" charset="-122"/>
                 <a:cs typeface="Arial" pitchFamily="34" charset="-120"/>
               </a:rPr>
-              <a:t>But life eternal calls to us at the cross.</a:t>
-            </a:r>
-            <a:endParaRPr lang="en-US" sz="4800" dirty="0"/>
+              <a:t>But life eternal calls to us at the cross</a:t>
+            </a:r>
+            <a:endParaRPr lang="en-US" sz="4900" dirty="0"/>
           </a:p>
         </p:txBody>
       </p:sp>
@@ -3690,8 +3690,8 @@
         </p:nvSpPr>
         <p:spPr>
           <a:xfrm>
-            <a:off x="548640" y="457200"/>
-            <a:ext cx="11064240" cy="5943600"/>
+            <a:off x="292608" y="457200"/>
+            <a:ext cx="11612880" cy="5943600"/>
           </a:xfrm>
           <a:prstGeom prst="rect">
             <a:avLst/>
@@ -3707,7 +3707,7 @@
               <a:buNone/>
             </a:pPr>
             <a:r>
-              <a:rPr lang="en-US" sz="4800" b="1" dirty="0">
+              <a:rPr lang="en-US" sz="5000" b="1" dirty="0">
                 <a:solidFill>
                   <a:srgbClr val="FFFFFF"/>
                 </a:solidFill>
@@ -3717,14 +3717,14 @@
               </a:rPr>
               <a:t>I will not boast in wealth or might,</a:t>
             </a:r>
-            <a:endParaRPr lang="en-US" sz="4800" dirty="0"/>
+            <a:endParaRPr lang="en-US" sz="5000" dirty="0"/>
           </a:p>
           <a:p>
             <a:pPr algn="ctr" indent="0" marL="0">
               <a:buNone/>
             </a:pPr>
             <a:r>
-              <a:rPr lang="en-US" sz="4800" b="1" dirty="0">
+              <a:rPr lang="en-US" sz="5000" b="1" dirty="0">
                 <a:solidFill>
                   <a:srgbClr val="FFFFFF"/>
                 </a:solidFill>
@@ -3734,14 +3734,14 @@
               </a:rPr>
               <a:t>or human wisdom’s fleeting light.</a:t>
             </a:r>
-            <a:endParaRPr lang="en-US" sz="4800" dirty="0"/>
+            <a:endParaRPr lang="en-US" sz="5000" dirty="0"/>
           </a:p>
           <a:p>
             <a:pPr algn="ctr" indent="0" marL="0">
               <a:buNone/>
             </a:pPr>
             <a:r>
-              <a:rPr lang="en-US" sz="4800" b="1" dirty="0">
+              <a:rPr lang="en-US" sz="5000" b="1" dirty="0">
                 <a:solidFill>
                   <a:srgbClr val="FFFFFF"/>
                 </a:solidFill>
@@ -3749,16 +3749,16 @@
                 <a:ea typeface="Arial" pitchFamily="34" charset="-122"/>
                 <a:cs typeface="Arial" pitchFamily="34" charset="-120"/>
               </a:rPr>
-              <a:t>But I will boast in knowing Christ </a:t>
-            </a:r>
-            <a:endParaRPr lang="en-US" sz="4800" dirty="0"/>
+              <a:t>But I will boast in knowing Christ</a:t>
+            </a:r>
+            <a:endParaRPr lang="en-US" sz="5000" dirty="0"/>
           </a:p>
           <a:p>
             <a:pPr algn="ctr" indent="0" marL="0">
               <a:buNone/>
             </a:pPr>
             <a:r>
-              <a:rPr lang="en-US" sz="4800" b="1" dirty="0">
+              <a:rPr lang="en-US" sz="5000" b="1" dirty="0">
                 <a:solidFill>
                   <a:srgbClr val="FFFFFF"/>
                 </a:solidFill>
@@ -3768,7 +3768,7 @@
               </a:rPr>
               <a:t>at the cross.</a:t>
             </a:r>
-            <a:endParaRPr lang="en-US" sz="4800" dirty="0"/>
+            <a:endParaRPr lang="en-US" sz="5000" dirty="0"/>
           </a:p>
         </p:txBody>
       </p:sp>
@@ -3851,8 +3851,8 @@
         </p:nvSpPr>
         <p:spPr>
           <a:xfrm>
-            <a:off x="548640" y="457200"/>
-            <a:ext cx="11064240" cy="5943600"/>
+            <a:off x="292608" y="457200"/>
+            <a:ext cx="11612880" cy="5943600"/>
           </a:xfrm>
           <a:prstGeom prst="rect">
             <a:avLst/>
@@ -3868,7 +3868,7 @@
               <a:buNone/>
             </a:pPr>
             <a:r>
-              <a:rPr lang="en-US" sz="4800" b="1" i="1" dirty="0">
+              <a:rPr lang="en-US" sz="5000" b="1" i="1" dirty="0">
                 <a:solidFill>
                   <a:srgbClr val="FFFFFF"/>
                 </a:solidFill>
@@ -3878,14 +3878,14 @@
               </a:rPr>
               <a:t>I rejoice in my Redeemer,</a:t>
             </a:r>
-            <a:endParaRPr lang="en-US" sz="4800" dirty="0"/>
+            <a:endParaRPr lang="en-US" sz="5000" dirty="0"/>
           </a:p>
           <a:p>
             <a:pPr algn="ctr" indent="0" marL="0">
               <a:buNone/>
             </a:pPr>
             <a:r>
-              <a:rPr lang="en-US" sz="4800" b="1" i="1" dirty="0">
+              <a:rPr lang="en-US" sz="5000" b="1" i="1" dirty="0">
                 <a:solidFill>
                   <a:srgbClr val="FFFFFF"/>
                 </a:solidFill>
@@ -3895,14 +3895,14 @@
               </a:rPr>
               <a:t>Greatest Treasure,</a:t>
             </a:r>
-            <a:endParaRPr lang="en-US" sz="4800" dirty="0"/>
+            <a:endParaRPr lang="en-US" sz="5000" dirty="0"/>
           </a:p>
           <a:p>
             <a:pPr algn="ctr" indent="0" marL="0">
               <a:buNone/>
             </a:pPr>
             <a:r>
-              <a:rPr lang="en-US" sz="4800" b="1" i="1" dirty="0">
+              <a:rPr lang="en-US" sz="5000" b="1" i="1" dirty="0">
                 <a:solidFill>
                   <a:srgbClr val="FFFFFF"/>
                 </a:solidFill>
@@ -3912,7 +3912,7 @@
               </a:rPr>
               <a:t>Wellspring of my soul.</a:t>
             </a:r>
-            <a:endParaRPr lang="en-US" sz="4800" dirty="0"/>
+            <a:endParaRPr lang="en-US" sz="5000" dirty="0"/>
           </a:p>
         </p:txBody>
       </p:sp>
@@ -3995,8 +3995,8 @@
         </p:nvSpPr>
         <p:spPr>
           <a:xfrm>
-            <a:off x="548640" y="457200"/>
-            <a:ext cx="11064240" cy="5943600"/>
+            <a:off x="292608" y="457200"/>
+            <a:ext cx="11612880" cy="5943600"/>
           </a:xfrm>
           <a:prstGeom prst="rect">
             <a:avLst/>
@@ -4012,7 +4012,7 @@
               <a:buNone/>
             </a:pPr>
             <a:r>
-              <a:rPr lang="en-US" sz="4800" b="1" i="1" dirty="0">
+              <a:rPr lang="en-US" sz="5000" b="1" i="1" dirty="0">
                 <a:solidFill>
                   <a:srgbClr val="FFFFFF"/>
                 </a:solidFill>
@@ -4022,14 +4022,14 @@
               </a:rPr>
               <a:t>I will trust in Him, no other,</a:t>
             </a:r>
-            <a:endParaRPr lang="en-US" sz="4800" dirty="0"/>
+            <a:endParaRPr lang="en-US" sz="5000" dirty="0"/>
           </a:p>
           <a:p>
             <a:pPr algn="ctr" indent="0" marL="0">
               <a:buNone/>
             </a:pPr>
             <a:r>
-              <a:rPr lang="en-US" sz="4800" b="1" i="1" dirty="0">
+              <a:rPr lang="en-US" sz="5000" b="1" i="1" dirty="0">
                 <a:solidFill>
                   <a:srgbClr val="FFFFFF"/>
                 </a:solidFill>
@@ -4039,7 +4039,7 @@
               </a:rPr>
               <a:t>my soul is satisfied in Him alone.</a:t>
             </a:r>
-            <a:endParaRPr lang="en-US" sz="4800" dirty="0"/>
+            <a:endParaRPr lang="en-US" sz="5000" dirty="0"/>
           </a:p>
         </p:txBody>
       </p:sp>
